--- a/中越詩歌/賀年歌_Lời chúc năm mới.pptx
+++ b/中越詩歌/賀年歌_Lời chúc năm mới.pptx
@@ -112,6 +112,11 @@
       </a:defRPr>
     </a:lvl9pPr>
   </p:defaultTextStyle>
+  <p:extLst>
+    <p:ext uri="{EFAFB233-063F-42B5-8137-9DF3F51BA10A}">
+      <p15:sldGuideLst xmlns:p15="http://schemas.microsoft.com/office/powerpoint/2012/main"/>
+    </p:ext>
+  </p:extLst>
 </p:presentation>
 </file>
 
@@ -153,7 +158,7 @@
           <a:lstStyle/>
           <a:p>
             <a:r>
-              <a:rPr lang="en-US" altLang="zh-TW" smtClean="0"/>
+              <a:rPr lang="en-US" altLang="zh-TW"/>
               <a:t>Click to edit Master title style</a:t>
             </a:r>
             <a:endParaRPr lang="zh-TW" altLang="en-US"/>
@@ -272,7 +277,7 @@
           </a:lstStyle>
           <a:p>
             <a:r>
-              <a:rPr lang="en-US" altLang="zh-TW" smtClean="0"/>
+              <a:rPr lang="en-US" altLang="zh-TW"/>
               <a:t>Click to edit Master subtitle style</a:t>
             </a:r>
             <a:endParaRPr lang="zh-TW" altLang="en-US"/>
@@ -296,7 +301,7 @@
           <a:p>
             <a:fld id="{A46F35FE-84BF-429E-AAA1-22ACF5210481}" type="datetimeFigureOut">
               <a:rPr lang="vi-VN" smtClean="0"/>
-              <a:t>29/01/2022</a:t>
+              <a:t>26/01/2025</a:t>
             </a:fld>
             <a:endParaRPr lang="vi-VN"/>
           </a:p>
@@ -390,7 +395,7 @@
           <a:lstStyle/>
           <a:p>
             <a:r>
-              <a:rPr lang="en-US" altLang="zh-TW" smtClean="0"/>
+              <a:rPr lang="en-US" altLang="zh-TW"/>
               <a:t>Click to edit Master title style</a:t>
             </a:r>
             <a:endParaRPr lang="zh-TW" altLang="en-US"/>
@@ -414,35 +419,35 @@
           <a:p>
             <a:pPr lvl="0"/>
             <a:r>
-              <a:rPr lang="en-US" altLang="zh-TW" smtClean="0"/>
+              <a:rPr lang="en-US" altLang="zh-TW"/>
               <a:t>Edit Master text styles</a:t>
             </a:r>
           </a:p>
           <a:p>
             <a:pPr lvl="1"/>
             <a:r>
-              <a:rPr lang="en-US" altLang="zh-TW" smtClean="0"/>
+              <a:rPr lang="en-US" altLang="zh-TW"/>
               <a:t>Second level</a:t>
             </a:r>
           </a:p>
           <a:p>
             <a:pPr lvl="2"/>
             <a:r>
-              <a:rPr lang="en-US" altLang="zh-TW" smtClean="0"/>
+              <a:rPr lang="en-US" altLang="zh-TW"/>
               <a:t>Third level</a:t>
             </a:r>
           </a:p>
           <a:p>
             <a:pPr lvl="3"/>
             <a:r>
-              <a:rPr lang="en-US" altLang="zh-TW" smtClean="0"/>
+              <a:rPr lang="en-US" altLang="zh-TW"/>
               <a:t>Fourth level</a:t>
             </a:r>
           </a:p>
           <a:p>
             <a:pPr lvl="4"/>
             <a:r>
-              <a:rPr lang="en-US" altLang="zh-TW" smtClean="0"/>
+              <a:rPr lang="en-US" altLang="zh-TW"/>
               <a:t>Fifth level</a:t>
             </a:r>
             <a:endParaRPr lang="zh-TW" altLang="en-US"/>
@@ -466,7 +471,7 @@
           <a:p>
             <a:fld id="{A46F35FE-84BF-429E-AAA1-22ACF5210481}" type="datetimeFigureOut">
               <a:rPr lang="vi-VN" smtClean="0"/>
-              <a:t>29/01/2022</a:t>
+              <a:t>26/01/2025</a:t>
             </a:fld>
             <a:endParaRPr lang="vi-VN"/>
           </a:p>
@@ -565,7 +570,7 @@
           <a:lstStyle/>
           <a:p>
             <a:r>
-              <a:rPr lang="en-US" altLang="zh-TW" smtClean="0"/>
+              <a:rPr lang="en-US" altLang="zh-TW"/>
               <a:t>Click to edit Master title style</a:t>
             </a:r>
             <a:endParaRPr lang="zh-TW" altLang="en-US"/>
@@ -594,35 +599,35 @@
           <a:p>
             <a:pPr lvl="0"/>
             <a:r>
-              <a:rPr lang="en-US" altLang="zh-TW" smtClean="0"/>
+              <a:rPr lang="en-US" altLang="zh-TW"/>
               <a:t>Edit Master text styles</a:t>
             </a:r>
           </a:p>
           <a:p>
             <a:pPr lvl="1"/>
             <a:r>
-              <a:rPr lang="en-US" altLang="zh-TW" smtClean="0"/>
+              <a:rPr lang="en-US" altLang="zh-TW"/>
               <a:t>Second level</a:t>
             </a:r>
           </a:p>
           <a:p>
             <a:pPr lvl="2"/>
             <a:r>
-              <a:rPr lang="en-US" altLang="zh-TW" smtClean="0"/>
+              <a:rPr lang="en-US" altLang="zh-TW"/>
               <a:t>Third level</a:t>
             </a:r>
           </a:p>
           <a:p>
             <a:pPr lvl="3"/>
             <a:r>
-              <a:rPr lang="en-US" altLang="zh-TW" smtClean="0"/>
+              <a:rPr lang="en-US" altLang="zh-TW"/>
               <a:t>Fourth level</a:t>
             </a:r>
           </a:p>
           <a:p>
             <a:pPr lvl="4"/>
             <a:r>
-              <a:rPr lang="en-US" altLang="zh-TW" smtClean="0"/>
+              <a:rPr lang="en-US" altLang="zh-TW"/>
               <a:t>Fifth level</a:t>
             </a:r>
             <a:endParaRPr lang="zh-TW" altLang="en-US"/>
@@ -646,7 +651,7 @@
           <a:p>
             <a:fld id="{A46F35FE-84BF-429E-AAA1-22ACF5210481}" type="datetimeFigureOut">
               <a:rPr lang="vi-VN" smtClean="0"/>
-              <a:t>29/01/2022</a:t>
+              <a:t>26/01/2025</a:t>
             </a:fld>
             <a:endParaRPr lang="vi-VN"/>
           </a:p>
@@ -740,7 +745,7 @@
           <a:lstStyle/>
           <a:p>
             <a:r>
-              <a:rPr lang="en-US" altLang="zh-TW" smtClean="0"/>
+              <a:rPr lang="en-US" altLang="zh-TW"/>
               <a:t>Click to edit Master title style</a:t>
             </a:r>
             <a:endParaRPr lang="zh-TW" altLang="en-US"/>
@@ -764,35 +769,35 @@
           <a:p>
             <a:pPr lvl="0"/>
             <a:r>
-              <a:rPr lang="en-US" altLang="zh-TW" smtClean="0"/>
+              <a:rPr lang="en-US" altLang="zh-TW"/>
               <a:t>Edit Master text styles</a:t>
             </a:r>
           </a:p>
           <a:p>
             <a:pPr lvl="1"/>
             <a:r>
-              <a:rPr lang="en-US" altLang="zh-TW" smtClean="0"/>
+              <a:rPr lang="en-US" altLang="zh-TW"/>
               <a:t>Second level</a:t>
             </a:r>
           </a:p>
           <a:p>
             <a:pPr lvl="2"/>
             <a:r>
-              <a:rPr lang="en-US" altLang="zh-TW" smtClean="0"/>
+              <a:rPr lang="en-US" altLang="zh-TW"/>
               <a:t>Third level</a:t>
             </a:r>
           </a:p>
           <a:p>
             <a:pPr lvl="3"/>
             <a:r>
-              <a:rPr lang="en-US" altLang="zh-TW" smtClean="0"/>
+              <a:rPr lang="en-US" altLang="zh-TW"/>
               <a:t>Fourth level</a:t>
             </a:r>
           </a:p>
           <a:p>
             <a:pPr lvl="4"/>
             <a:r>
-              <a:rPr lang="en-US" altLang="zh-TW" smtClean="0"/>
+              <a:rPr lang="en-US" altLang="zh-TW"/>
               <a:t>Fifth level</a:t>
             </a:r>
             <a:endParaRPr lang="zh-TW" altLang="en-US"/>
@@ -816,7 +821,7 @@
           <a:p>
             <a:fld id="{A46F35FE-84BF-429E-AAA1-22ACF5210481}" type="datetimeFigureOut">
               <a:rPr lang="vi-VN" smtClean="0"/>
-              <a:t>29/01/2022</a:t>
+              <a:t>26/01/2025</a:t>
             </a:fld>
             <a:endParaRPr lang="vi-VN"/>
           </a:p>
@@ -919,7 +924,7 @@
           </a:lstStyle>
           <a:p>
             <a:r>
-              <a:rPr lang="en-US" altLang="zh-TW" smtClean="0"/>
+              <a:rPr lang="en-US" altLang="zh-TW"/>
               <a:t>Click to edit Master title style</a:t>
             </a:r>
             <a:endParaRPr lang="zh-TW" altLang="en-US"/>
@@ -1039,7 +1044,7 @@
           <a:p>
             <a:pPr lvl="0"/>
             <a:r>
-              <a:rPr lang="en-US" altLang="zh-TW" smtClean="0"/>
+              <a:rPr lang="en-US" altLang="zh-TW"/>
               <a:t>Edit Master text styles</a:t>
             </a:r>
           </a:p>
@@ -1062,7 +1067,7 @@
           <a:p>
             <a:fld id="{A46F35FE-84BF-429E-AAA1-22ACF5210481}" type="datetimeFigureOut">
               <a:rPr lang="vi-VN" smtClean="0"/>
-              <a:t>29/01/2022</a:t>
+              <a:t>26/01/2025</a:t>
             </a:fld>
             <a:endParaRPr lang="vi-VN"/>
           </a:p>
@@ -1156,7 +1161,7 @@
           <a:lstStyle/>
           <a:p>
             <a:r>
-              <a:rPr lang="en-US" altLang="zh-TW" smtClean="0"/>
+              <a:rPr lang="en-US" altLang="zh-TW"/>
               <a:t>Click to edit Master title style</a:t>
             </a:r>
             <a:endParaRPr lang="zh-TW" altLang="en-US"/>
@@ -1213,35 +1218,35 @@
           <a:p>
             <a:pPr lvl="0"/>
             <a:r>
-              <a:rPr lang="en-US" altLang="zh-TW" smtClean="0"/>
+              <a:rPr lang="en-US" altLang="zh-TW"/>
               <a:t>Edit Master text styles</a:t>
             </a:r>
           </a:p>
           <a:p>
             <a:pPr lvl="1"/>
             <a:r>
-              <a:rPr lang="en-US" altLang="zh-TW" smtClean="0"/>
+              <a:rPr lang="en-US" altLang="zh-TW"/>
               <a:t>Second level</a:t>
             </a:r>
           </a:p>
           <a:p>
             <a:pPr lvl="2"/>
             <a:r>
-              <a:rPr lang="en-US" altLang="zh-TW" smtClean="0"/>
+              <a:rPr lang="en-US" altLang="zh-TW"/>
               <a:t>Third level</a:t>
             </a:r>
           </a:p>
           <a:p>
             <a:pPr lvl="3"/>
             <a:r>
-              <a:rPr lang="en-US" altLang="zh-TW" smtClean="0"/>
+              <a:rPr lang="en-US" altLang="zh-TW"/>
               <a:t>Fourth level</a:t>
             </a:r>
           </a:p>
           <a:p>
             <a:pPr lvl="4"/>
             <a:r>
-              <a:rPr lang="en-US" altLang="zh-TW" smtClean="0"/>
+              <a:rPr lang="en-US" altLang="zh-TW"/>
               <a:t>Fifth level</a:t>
             </a:r>
             <a:endParaRPr lang="zh-TW" altLang="en-US"/>
@@ -1298,35 +1303,35 @@
           <a:p>
             <a:pPr lvl="0"/>
             <a:r>
-              <a:rPr lang="en-US" altLang="zh-TW" smtClean="0"/>
+              <a:rPr lang="en-US" altLang="zh-TW"/>
               <a:t>Edit Master text styles</a:t>
             </a:r>
           </a:p>
           <a:p>
             <a:pPr lvl="1"/>
             <a:r>
-              <a:rPr lang="en-US" altLang="zh-TW" smtClean="0"/>
+              <a:rPr lang="en-US" altLang="zh-TW"/>
               <a:t>Second level</a:t>
             </a:r>
           </a:p>
           <a:p>
             <a:pPr lvl="2"/>
             <a:r>
-              <a:rPr lang="en-US" altLang="zh-TW" smtClean="0"/>
+              <a:rPr lang="en-US" altLang="zh-TW"/>
               <a:t>Third level</a:t>
             </a:r>
           </a:p>
           <a:p>
             <a:pPr lvl="3"/>
             <a:r>
-              <a:rPr lang="en-US" altLang="zh-TW" smtClean="0"/>
+              <a:rPr lang="en-US" altLang="zh-TW"/>
               <a:t>Fourth level</a:t>
             </a:r>
           </a:p>
           <a:p>
             <a:pPr lvl="4"/>
             <a:r>
-              <a:rPr lang="en-US" altLang="zh-TW" smtClean="0"/>
+              <a:rPr lang="en-US" altLang="zh-TW"/>
               <a:t>Fifth level</a:t>
             </a:r>
             <a:endParaRPr lang="zh-TW" altLang="en-US"/>
@@ -1350,7 +1355,7 @@
           <a:p>
             <a:fld id="{A46F35FE-84BF-429E-AAA1-22ACF5210481}" type="datetimeFigureOut">
               <a:rPr lang="vi-VN" smtClean="0"/>
-              <a:t>29/01/2022</a:t>
+              <a:t>26/01/2025</a:t>
             </a:fld>
             <a:endParaRPr lang="vi-VN"/>
           </a:p>
@@ -1448,7 +1453,7 @@
           </a:lstStyle>
           <a:p>
             <a:r>
-              <a:rPr lang="en-US" altLang="zh-TW" smtClean="0"/>
+              <a:rPr lang="en-US" altLang="zh-TW"/>
               <a:t>Click to edit Master title style</a:t>
             </a:r>
             <a:endParaRPr lang="zh-TW" altLang="en-US"/>
@@ -1514,7 +1519,7 @@
           <a:p>
             <a:pPr lvl="0"/>
             <a:r>
-              <a:rPr lang="en-US" altLang="zh-TW" smtClean="0"/>
+              <a:rPr lang="en-US" altLang="zh-TW"/>
               <a:t>Edit Master text styles</a:t>
             </a:r>
           </a:p>
@@ -1570,35 +1575,35 @@
           <a:p>
             <a:pPr lvl="0"/>
             <a:r>
-              <a:rPr lang="en-US" altLang="zh-TW" smtClean="0"/>
+              <a:rPr lang="en-US" altLang="zh-TW"/>
               <a:t>Edit Master text styles</a:t>
             </a:r>
           </a:p>
           <a:p>
             <a:pPr lvl="1"/>
             <a:r>
-              <a:rPr lang="en-US" altLang="zh-TW" smtClean="0"/>
+              <a:rPr lang="en-US" altLang="zh-TW"/>
               <a:t>Second level</a:t>
             </a:r>
           </a:p>
           <a:p>
             <a:pPr lvl="2"/>
             <a:r>
-              <a:rPr lang="en-US" altLang="zh-TW" smtClean="0"/>
+              <a:rPr lang="en-US" altLang="zh-TW"/>
               <a:t>Third level</a:t>
             </a:r>
           </a:p>
           <a:p>
             <a:pPr lvl="3"/>
             <a:r>
-              <a:rPr lang="en-US" altLang="zh-TW" smtClean="0"/>
+              <a:rPr lang="en-US" altLang="zh-TW"/>
               <a:t>Fourth level</a:t>
             </a:r>
           </a:p>
           <a:p>
             <a:pPr lvl="4"/>
             <a:r>
-              <a:rPr lang="en-US" altLang="zh-TW" smtClean="0"/>
+              <a:rPr lang="en-US" altLang="zh-TW"/>
               <a:t>Fifth level</a:t>
             </a:r>
             <a:endParaRPr lang="zh-TW" altLang="en-US"/>
@@ -1664,7 +1669,7 @@
           <a:p>
             <a:pPr lvl="0"/>
             <a:r>
-              <a:rPr lang="en-US" altLang="zh-TW" smtClean="0"/>
+              <a:rPr lang="en-US" altLang="zh-TW"/>
               <a:t>Edit Master text styles</a:t>
             </a:r>
           </a:p>
@@ -1720,35 +1725,35 @@
           <a:p>
             <a:pPr lvl="0"/>
             <a:r>
-              <a:rPr lang="en-US" altLang="zh-TW" smtClean="0"/>
+              <a:rPr lang="en-US" altLang="zh-TW"/>
               <a:t>Edit Master text styles</a:t>
             </a:r>
           </a:p>
           <a:p>
             <a:pPr lvl="1"/>
             <a:r>
-              <a:rPr lang="en-US" altLang="zh-TW" smtClean="0"/>
+              <a:rPr lang="en-US" altLang="zh-TW"/>
               <a:t>Second level</a:t>
             </a:r>
           </a:p>
           <a:p>
             <a:pPr lvl="2"/>
             <a:r>
-              <a:rPr lang="en-US" altLang="zh-TW" smtClean="0"/>
+              <a:rPr lang="en-US" altLang="zh-TW"/>
               <a:t>Third level</a:t>
             </a:r>
           </a:p>
           <a:p>
             <a:pPr lvl="3"/>
             <a:r>
-              <a:rPr lang="en-US" altLang="zh-TW" smtClean="0"/>
+              <a:rPr lang="en-US" altLang="zh-TW"/>
               <a:t>Fourth level</a:t>
             </a:r>
           </a:p>
           <a:p>
             <a:pPr lvl="4"/>
             <a:r>
-              <a:rPr lang="en-US" altLang="zh-TW" smtClean="0"/>
+              <a:rPr lang="en-US" altLang="zh-TW"/>
               <a:t>Fifth level</a:t>
             </a:r>
             <a:endParaRPr lang="zh-TW" altLang="en-US"/>
@@ -1772,7 +1777,7 @@
           <a:p>
             <a:fld id="{A46F35FE-84BF-429E-AAA1-22ACF5210481}" type="datetimeFigureOut">
               <a:rPr lang="vi-VN" smtClean="0"/>
-              <a:t>29/01/2022</a:t>
+              <a:t>26/01/2025</a:t>
             </a:fld>
             <a:endParaRPr lang="vi-VN"/>
           </a:p>
@@ -1866,7 +1871,7 @@
           <a:lstStyle/>
           <a:p>
             <a:r>
-              <a:rPr lang="en-US" altLang="zh-TW" smtClean="0"/>
+              <a:rPr lang="en-US" altLang="zh-TW"/>
               <a:t>Click to edit Master title style</a:t>
             </a:r>
             <a:endParaRPr lang="zh-TW" altLang="en-US"/>
@@ -1890,7 +1895,7 @@
           <a:p>
             <a:fld id="{A46F35FE-84BF-429E-AAA1-22ACF5210481}" type="datetimeFigureOut">
               <a:rPr lang="vi-VN" smtClean="0"/>
-              <a:t>29/01/2022</a:t>
+              <a:t>26/01/2025</a:t>
             </a:fld>
             <a:endParaRPr lang="vi-VN"/>
           </a:p>
@@ -1985,7 +1990,7 @@
           <a:p>
             <a:fld id="{A46F35FE-84BF-429E-AAA1-22ACF5210481}" type="datetimeFigureOut">
               <a:rPr lang="vi-VN" smtClean="0"/>
-              <a:t>29/01/2022</a:t>
+              <a:t>26/01/2025</a:t>
             </a:fld>
             <a:endParaRPr lang="vi-VN"/>
           </a:p>
@@ -2088,7 +2093,7 @@
           </a:lstStyle>
           <a:p>
             <a:r>
-              <a:rPr lang="en-US" altLang="zh-TW" smtClean="0"/>
+              <a:rPr lang="en-US" altLang="zh-TW"/>
               <a:t>Click to edit Master title style</a:t>
             </a:r>
             <a:endParaRPr lang="zh-TW" altLang="en-US"/>
@@ -2145,35 +2150,35 @@
           <a:p>
             <a:pPr lvl="0"/>
             <a:r>
-              <a:rPr lang="en-US" altLang="zh-TW" smtClean="0"/>
+              <a:rPr lang="en-US" altLang="zh-TW"/>
               <a:t>Edit Master text styles</a:t>
             </a:r>
           </a:p>
           <a:p>
             <a:pPr lvl="1"/>
             <a:r>
-              <a:rPr lang="en-US" altLang="zh-TW" smtClean="0"/>
+              <a:rPr lang="en-US" altLang="zh-TW"/>
               <a:t>Second level</a:t>
             </a:r>
           </a:p>
           <a:p>
             <a:pPr lvl="2"/>
             <a:r>
-              <a:rPr lang="en-US" altLang="zh-TW" smtClean="0"/>
+              <a:rPr lang="en-US" altLang="zh-TW"/>
               <a:t>Third level</a:t>
             </a:r>
           </a:p>
           <a:p>
             <a:pPr lvl="3"/>
             <a:r>
-              <a:rPr lang="en-US" altLang="zh-TW" smtClean="0"/>
+              <a:rPr lang="en-US" altLang="zh-TW"/>
               <a:t>Fourth level</a:t>
             </a:r>
           </a:p>
           <a:p>
             <a:pPr lvl="4"/>
             <a:r>
-              <a:rPr lang="en-US" altLang="zh-TW" smtClean="0"/>
+              <a:rPr lang="en-US" altLang="zh-TW"/>
               <a:t>Fifth level</a:t>
             </a:r>
             <a:endParaRPr lang="zh-TW" altLang="en-US"/>
@@ -2239,7 +2244,7 @@
           <a:p>
             <a:pPr lvl="0"/>
             <a:r>
-              <a:rPr lang="en-US" altLang="zh-TW" smtClean="0"/>
+              <a:rPr lang="en-US" altLang="zh-TW"/>
               <a:t>Edit Master text styles</a:t>
             </a:r>
           </a:p>
@@ -2262,7 +2267,7 @@
           <a:p>
             <a:fld id="{A46F35FE-84BF-429E-AAA1-22ACF5210481}" type="datetimeFigureOut">
               <a:rPr lang="vi-VN" smtClean="0"/>
-              <a:t>29/01/2022</a:t>
+              <a:t>26/01/2025</a:t>
             </a:fld>
             <a:endParaRPr lang="vi-VN"/>
           </a:p>
@@ -2365,7 +2370,7 @@
           </a:lstStyle>
           <a:p>
             <a:r>
-              <a:rPr lang="en-US" altLang="zh-TW" smtClean="0"/>
+              <a:rPr lang="en-US" altLang="zh-TW"/>
               <a:t>Click to edit Master title style</a:t>
             </a:r>
             <a:endParaRPr lang="zh-TW" altLang="en-US"/>
@@ -2430,7 +2435,7 @@
           </a:lstStyle>
           <a:p>
             <a:r>
-              <a:rPr lang="en-US" altLang="zh-TW" smtClean="0"/>
+              <a:rPr lang="en-US" altLang="zh-TW"/>
               <a:t>Click icon to add picture</a:t>
             </a:r>
             <a:endParaRPr lang="zh-TW" altLang="en-US"/>
@@ -2496,7 +2501,7 @@
           <a:p>
             <a:pPr lvl="0"/>
             <a:r>
-              <a:rPr lang="en-US" altLang="zh-TW" smtClean="0"/>
+              <a:rPr lang="en-US" altLang="zh-TW"/>
               <a:t>Edit Master text styles</a:t>
             </a:r>
           </a:p>
@@ -2519,7 +2524,7 @@
           <a:p>
             <a:fld id="{A46F35FE-84BF-429E-AAA1-22ACF5210481}" type="datetimeFigureOut">
               <a:rPr lang="vi-VN" smtClean="0"/>
-              <a:t>29/01/2022</a:t>
+              <a:t>26/01/2025</a:t>
             </a:fld>
             <a:endParaRPr lang="vi-VN"/>
           </a:p>
@@ -2633,10 +2638,9 @@
           <a:lstStyle/>
           <a:p>
             <a:r>
-              <a:rPr lang="zh-TW" altLang="en-US" smtClean="0"/>
+              <a:rPr lang="zh-TW" altLang="en-US"/>
               <a:t>按一下以編輯母片標題樣式</a:t>
             </a:r>
-            <a:endParaRPr lang="zh-TW" altLang="en-US"/>
           </a:p>
         </p:txBody>
       </p:sp>
@@ -2667,38 +2671,37 @@
           <a:p>
             <a:pPr lvl="0"/>
             <a:r>
-              <a:rPr lang="zh-TW" altLang="en-US" smtClean="0"/>
+              <a:rPr lang="zh-TW" altLang="en-US"/>
               <a:t>按一下以編輯母片文字樣式</a:t>
             </a:r>
           </a:p>
           <a:p>
             <a:pPr lvl="1"/>
             <a:r>
-              <a:rPr lang="zh-TW" altLang="en-US" smtClean="0"/>
+              <a:rPr lang="zh-TW" altLang="en-US"/>
               <a:t>第二層</a:t>
             </a:r>
           </a:p>
           <a:p>
             <a:pPr lvl="2"/>
             <a:r>
-              <a:rPr lang="zh-TW" altLang="en-US" smtClean="0"/>
+              <a:rPr lang="zh-TW" altLang="en-US"/>
               <a:t>第三層</a:t>
             </a:r>
           </a:p>
           <a:p>
             <a:pPr lvl="3"/>
             <a:r>
-              <a:rPr lang="zh-TW" altLang="en-US" smtClean="0"/>
+              <a:rPr lang="zh-TW" altLang="en-US"/>
               <a:t>第四層</a:t>
             </a:r>
           </a:p>
           <a:p>
             <a:pPr lvl="4"/>
             <a:r>
-              <a:rPr lang="zh-TW" altLang="en-US" smtClean="0"/>
+              <a:rPr lang="zh-TW" altLang="en-US"/>
               <a:t>第五層</a:t>
             </a:r>
-            <a:endParaRPr lang="zh-TW" altLang="en-US"/>
           </a:p>
         </p:txBody>
       </p:sp>
@@ -2737,7 +2740,7 @@
           <a:p>
             <a:fld id="{A46F35FE-84BF-429E-AAA1-22ACF5210481}" type="datetimeFigureOut">
               <a:rPr lang="vi-VN" smtClean="0"/>
-              <a:t>29/01/2022</a:t>
+              <a:t>26/01/2025</a:t>
             </a:fld>
             <a:endParaRPr lang="vi-VN"/>
           </a:p>
@@ -3135,7 +3138,7 @@
           <a:lstStyle/>
           <a:p>
             <a:r>
-              <a:rPr lang="zh-CN" altLang="en-US" sz="7200" b="1" i="1" dirty="0" smtClean="0">
+              <a:rPr lang="zh-CN" altLang="en-US" sz="7200" b="1" i="1" dirty="0">
                 <a:solidFill>
                   <a:srgbClr val="000066"/>
                 </a:solidFill>
@@ -3149,24 +3152,7 @@
                 <a:latin typeface="微軟正黑體" pitchFamily="34" charset="-120"/>
                 <a:ea typeface="微軟正黑體" pitchFamily="34" charset="-120"/>
               </a:rPr>
-              <a:t>賀</a:t>
-            </a:r>
-            <a:r>
-              <a:rPr lang="zh-CN" altLang="en-US" sz="7200" b="1" i="1" dirty="0">
-                <a:solidFill>
-                  <a:srgbClr val="000066"/>
-                </a:solidFill>
-                <a:effectLst>
-                  <a:outerShdw blurRad="38100" dist="38100" dir="2700000" algn="tl">
-                    <a:srgbClr val="000000">
-                      <a:alpha val="43137"/>
-                    </a:srgbClr>
-                  </a:outerShdw>
-                </a:effectLst>
-                <a:latin typeface="微軟正黑體" pitchFamily="34" charset="-120"/>
-                <a:ea typeface="微軟正黑體" pitchFamily="34" charset="-120"/>
-              </a:rPr>
-              <a:t>年歌</a:t>
+              <a:t>賀年歌</a:t>
             </a:r>
             <a:endParaRPr lang="zh-TW" altLang="en-US" sz="7200" b="1" i="1" dirty="0">
               <a:solidFill>
@@ -3224,7 +3210,7 @@
           </a:lstStyle>
           <a:p>
             <a:r>
-              <a:rPr lang="vi-VN" sz="5400" b="1" i="1" dirty="0" smtClean="0">
+              <a:rPr lang="vi-VN" sz="5400" b="1" i="1" dirty="0">
                 <a:solidFill>
                   <a:srgbClr val="660033"/>
                 </a:solidFill>
@@ -3315,7 +3301,7 @@
               <a:buNone/>
             </a:pPr>
             <a:r>
-              <a:rPr lang="zh-CN" altLang="en-US" sz="6400" b="1" dirty="0" smtClean="0">
+              <a:rPr lang="zh-CN" altLang="en-US" sz="6400" b="1" dirty="0">
                 <a:solidFill>
                   <a:srgbClr val="000066"/>
                 </a:solidFill>
@@ -3323,62 +3309,7 @@
                 <a:latin typeface="微軟正黑體" pitchFamily="34" charset="-120"/>
                 <a:ea typeface="微軟正黑體" pitchFamily="34" charset="-120"/>
               </a:rPr>
-              <a:t>敬</a:t>
-            </a:r>
-            <a:r>
-              <a:rPr lang="zh-CN" altLang="en-US" sz="6400" b="1" dirty="0">
-                <a:solidFill>
-                  <a:srgbClr val="000066"/>
-                </a:solidFill>
-                <a:effectLst/>
-                <a:latin typeface="微軟正黑體" pitchFamily="34" charset="-120"/>
-                <a:ea typeface="微軟正黑體" pitchFamily="34" charset="-120"/>
-              </a:rPr>
-              <a:t>拜</a:t>
-            </a:r>
-            <a:r>
-              <a:rPr lang="zh-CN" altLang="en-US" sz="6400" b="1" dirty="0" smtClean="0">
-                <a:solidFill>
-                  <a:srgbClr val="000066"/>
-                </a:solidFill>
-                <a:effectLst/>
-                <a:latin typeface="微軟正黑體" pitchFamily="34" charset="-120"/>
-                <a:ea typeface="微軟正黑體" pitchFamily="34" charset="-120"/>
-              </a:rPr>
-              <a:t>主  </a:t>
-            </a:r>
-            <a:r>
-              <a:rPr lang="zh-CN" altLang="en-US" sz="6400" b="1" dirty="0">
-                <a:solidFill>
-                  <a:srgbClr val="000066"/>
-                </a:solidFill>
-                <a:effectLst/>
-                <a:latin typeface="微軟正黑體" pitchFamily="34" charset="-120"/>
-                <a:ea typeface="微軟正黑體" pitchFamily="34" charset="-120"/>
-              </a:rPr>
-              <a:t>祝新</a:t>
-            </a:r>
-            <a:r>
-              <a:rPr lang="zh-CN" altLang="en-US" sz="6400" b="1" dirty="0" smtClean="0">
-                <a:solidFill>
-                  <a:srgbClr val="000066"/>
-                </a:solidFill>
-                <a:effectLst/>
-                <a:latin typeface="微軟正黑體" pitchFamily="34" charset="-120"/>
-                <a:ea typeface="微軟正黑體" pitchFamily="34" charset="-120"/>
-              </a:rPr>
-              <a:t>年  </a:t>
-            </a:r>
-            <a:r>
-              <a:rPr lang="zh-CN" altLang="en-US" sz="6400" b="1" dirty="0">
-                <a:solidFill>
-                  <a:srgbClr val="000066"/>
-                </a:solidFill>
-                <a:effectLst/>
-                <a:latin typeface="微軟正黑體" pitchFamily="34" charset="-120"/>
-                <a:ea typeface="微軟正黑體" pitchFamily="34" charset="-120"/>
-              </a:rPr>
-              <a:t>頌讚主慶賀年</a:t>
+              <a:t>敬拜主  祝新年  頌讚主慶賀年</a:t>
             </a:r>
             <a:endParaRPr lang="en-US" altLang="zh-CN" sz="6400" b="1" dirty="0">
               <a:solidFill>
@@ -3554,7 +3485,7 @@
               <a:buNone/>
             </a:pPr>
             <a:r>
-              <a:rPr lang="vi-VN" sz="3600" b="1" dirty="0" smtClean="0">
+              <a:rPr lang="vi-VN" sz="3600" b="1" dirty="0">
                 <a:solidFill>
                   <a:srgbClr val="660033"/>
                 </a:solidFill>
@@ -3563,19 +3494,7 @@
                 <a:ea typeface="微軟正黑體" pitchFamily="34" charset="-120"/>
                 <a:cs typeface="Calibri" panose="020F0502020204030204" pitchFamily="34" charset="0"/>
               </a:rPr>
-              <a:t>Vui </a:t>
-            </a:r>
-            <a:r>
-              <a:rPr lang="vi-VN" sz="3600" b="1" dirty="0">
-                <a:solidFill>
-                  <a:srgbClr val="660033"/>
-                </a:solidFill>
-                <a:effectLst/>
-                <a:latin typeface="Calibri" panose="020F0502020204030204" pitchFamily="34" charset="0"/>
-                <a:ea typeface="微軟正黑體" pitchFamily="34" charset="-120"/>
-                <a:cs typeface="Calibri" panose="020F0502020204030204" pitchFamily="34" charset="0"/>
-              </a:rPr>
-              <a:t>xuân đến, hát khúc ca, ngợi khen Chúa, tôn vinh Ngài</a:t>
+              <a:t>Vui xuân đến, hát khúc ca, ngợi khen Chúa, tôn vinh Ngài</a:t>
             </a:r>
             <a:endParaRPr lang="en-US" sz="3600" b="1" dirty="0">
               <a:solidFill>
@@ -3624,7 +3543,7 @@
               <a:t>( </a:t>
             </a:r>
             <a:r>
-              <a:rPr lang="zh-CN" altLang="en-US" sz="4267" b="1" dirty="0" smtClean="0">
+              <a:rPr lang="zh-CN" altLang="en-US" sz="4267" b="1" dirty="0">
                 <a:solidFill>
                   <a:srgbClr val="000066"/>
                 </a:solidFill>
@@ -3632,10 +3551,10 @@
                 <a:latin typeface="Microsoft JhengHei" panose="020B0604030504040204" pitchFamily="34" charset="-120"/>
                 <a:ea typeface="Microsoft JhengHei" panose="020B0604030504040204" pitchFamily="34" charset="-120"/>
               </a:rPr>
-              <a:t>正</a:t>
-            </a:r>
-            <a:r>
-              <a:rPr lang="en-US" sz="4267" b="1" dirty="0" smtClean="0">
+              <a:t>正歌</a:t>
+            </a:r>
+            <a:r>
+              <a:rPr lang="en-US" sz="4267" b="1" dirty="0">
                 <a:solidFill>
                   <a:srgbClr val="000066"/>
                 </a:solidFill>
@@ -3643,18 +3562,7 @@
                 <a:latin typeface="Microsoft JhengHei" panose="020B0604030504040204" pitchFamily="34" charset="-120"/>
                 <a:ea typeface="Microsoft JhengHei" panose="020B0604030504040204" pitchFamily="34" charset="-120"/>
               </a:rPr>
-              <a:t> </a:t>
-            </a:r>
-            <a:r>
-              <a:rPr lang="en-US" sz="4267" b="1" dirty="0">
-                <a:solidFill>
-                  <a:srgbClr val="000066"/>
-                </a:solidFill>
-                <a:effectLst/>
-                <a:latin typeface="Microsoft JhengHei" panose="020B0604030504040204" pitchFamily="34" charset="-120"/>
-                <a:ea typeface="Microsoft JhengHei" panose="020B0604030504040204" pitchFamily="34" charset="-120"/>
-              </a:rPr>
-              <a:t>)</a:t>
+              <a:t> )</a:t>
             </a:r>
             <a:endParaRPr lang="vi-VN" sz="4267" b="1" dirty="0">
               <a:solidFill>
@@ -3964,7 +3872,7 @@
               <a:t>( </a:t>
             </a:r>
             <a:r>
-              <a:rPr lang="zh-CN" altLang="en-US" sz="4267" b="1" dirty="0" smtClean="0">
+              <a:rPr lang="zh-CN" altLang="en-US" sz="4267" b="1" dirty="0">
                 <a:solidFill>
                   <a:srgbClr val="000066"/>
                 </a:solidFill>
@@ -3972,10 +3880,10 @@
                 <a:latin typeface="Microsoft JhengHei" panose="020B0604030504040204" pitchFamily="34" charset="-120"/>
                 <a:ea typeface="Microsoft JhengHei" panose="020B0604030504040204" pitchFamily="34" charset="-120"/>
               </a:rPr>
-              <a:t>正</a:t>
-            </a:r>
-            <a:r>
-              <a:rPr lang="en-US" sz="4267" b="1" dirty="0" smtClean="0">
+              <a:t>正歌</a:t>
+            </a:r>
+            <a:r>
+              <a:rPr lang="en-US" sz="4267" b="1" dirty="0">
                 <a:solidFill>
                   <a:srgbClr val="000066"/>
                 </a:solidFill>
@@ -3983,18 +3891,7 @@
                 <a:latin typeface="Microsoft JhengHei" panose="020B0604030504040204" pitchFamily="34" charset="-120"/>
                 <a:ea typeface="Microsoft JhengHei" panose="020B0604030504040204" pitchFamily="34" charset="-120"/>
               </a:rPr>
-              <a:t> </a:t>
-            </a:r>
-            <a:r>
-              <a:rPr lang="en-US" sz="4267" b="1" dirty="0">
-                <a:solidFill>
-                  <a:srgbClr val="000066"/>
-                </a:solidFill>
-                <a:effectLst/>
-                <a:latin typeface="Microsoft JhengHei" panose="020B0604030504040204" pitchFamily="34" charset="-120"/>
-                <a:ea typeface="Microsoft JhengHei" panose="020B0604030504040204" pitchFamily="34" charset="-120"/>
-              </a:rPr>
-              <a:t>)</a:t>
+              <a:t> )</a:t>
             </a:r>
             <a:endParaRPr lang="vi-VN" sz="4267" b="1" dirty="0">
               <a:solidFill>
@@ -4070,73 +3967,7 @@
                 <a:latin typeface="微軟正黑體" pitchFamily="34" charset="-120"/>
                 <a:ea typeface="微軟正黑體" pitchFamily="34" charset="-120"/>
               </a:rPr>
-              <a:t>信靠主 </a:t>
-            </a:r>
-            <a:r>
-              <a:rPr lang="zh-CN" altLang="en-US" sz="6400" b="1" dirty="0" smtClean="0">
-                <a:solidFill>
-                  <a:srgbClr val="000066"/>
-                </a:solidFill>
-                <a:effectLst/>
-                <a:latin typeface="微軟正黑體" pitchFamily="34" charset="-120"/>
-                <a:ea typeface="微軟正黑體" pitchFamily="34" charset="-120"/>
-              </a:rPr>
-              <a:t> 快</a:t>
-            </a:r>
-            <a:r>
-              <a:rPr lang="zh-CN" altLang="en-US" sz="6400" b="1" dirty="0">
-                <a:solidFill>
-                  <a:srgbClr val="000066"/>
-                </a:solidFill>
-                <a:effectLst/>
-                <a:latin typeface="微軟正黑體" pitchFamily="34" charset="-120"/>
-                <a:ea typeface="微軟正黑體" pitchFamily="34" charset="-120"/>
-              </a:rPr>
-              <a:t>樂</a:t>
-            </a:r>
-            <a:r>
-              <a:rPr lang="zh-CN" altLang="en-US" sz="6400" b="1" dirty="0" smtClean="0">
-                <a:solidFill>
-                  <a:srgbClr val="000066"/>
-                </a:solidFill>
-                <a:effectLst/>
-                <a:latin typeface="微軟正黑體" pitchFamily="34" charset="-120"/>
-                <a:ea typeface="微軟正黑體" pitchFamily="34" charset="-120"/>
-              </a:rPr>
-              <a:t>年  </a:t>
-            </a:r>
-            <a:r>
-              <a:rPr lang="zh-CN" altLang="en-US" sz="6400" b="1" dirty="0">
-                <a:solidFill>
-                  <a:srgbClr val="000066"/>
-                </a:solidFill>
-                <a:effectLst/>
-                <a:latin typeface="微軟正黑體" pitchFamily="34" charset="-120"/>
-                <a:ea typeface="微軟正黑體" pitchFamily="34" charset="-120"/>
-              </a:rPr>
-              <a:t>同讚主 </a:t>
-            </a:r>
-            <a:r>
-              <a:rPr lang="zh-CN" altLang="en-US" sz="6400" b="1" dirty="0" smtClean="0">
-                <a:solidFill>
-                  <a:srgbClr val="000066"/>
-                </a:solidFill>
-                <a:effectLst/>
-                <a:latin typeface="微軟正黑體" pitchFamily="34" charset="-120"/>
-                <a:ea typeface="微軟正黑體" pitchFamily="34" charset="-120"/>
-              </a:rPr>
-              <a:t> 過</a:t>
-            </a:r>
-            <a:r>
-              <a:rPr lang="zh-CN" altLang="en-US" sz="6400" b="1" dirty="0">
-                <a:solidFill>
-                  <a:srgbClr val="000066"/>
-                </a:solidFill>
-                <a:effectLst/>
-                <a:latin typeface="微軟正黑體" pitchFamily="34" charset="-120"/>
-                <a:ea typeface="微軟正黑體" pitchFamily="34" charset="-120"/>
-              </a:rPr>
-              <a:t>年年</a:t>
+              <a:t>信靠主  快樂年  同讚主  過年年</a:t>
             </a:r>
             <a:endParaRPr lang="en-US" altLang="zh-CN" sz="6400" b="1" dirty="0">
               <a:solidFill>
@@ -4321,31 +4152,7 @@
                 <a:ea typeface="微軟正黑體" pitchFamily="34" charset="-120"/>
                 <a:cs typeface="Calibri" panose="020F0502020204030204" pitchFamily="34" charset="0"/>
               </a:rPr>
-              <a:t>Thêm yêu Chúa, luôn tin cậy, </a:t>
-            </a:r>
-            <a:r>
-              <a:rPr lang="vi-VN" sz="3600" b="1" dirty="0">
-                <a:solidFill>
-                  <a:srgbClr val="660033"/>
-                </a:solidFill>
-                <a:effectLst/>
-                <a:latin typeface="Calibri" panose="020F0502020204030204" pitchFamily="34" charset="0"/>
-                <a:ea typeface="微軟正黑體" pitchFamily="34" charset="-120"/>
-                <a:cs typeface="Calibri" panose="020F0502020204030204" pitchFamily="34" charset="0"/>
-              </a:rPr>
-              <a:t>hầu </a:t>
-            </a:r>
-            <a:r>
-              <a:rPr lang="vi-VN" sz="3600" b="1" dirty="0">
-                <a:solidFill>
-                  <a:srgbClr val="660033"/>
-                </a:solidFill>
-                <a:effectLst/>
-                <a:latin typeface="Calibri" panose="020F0502020204030204" pitchFamily="34" charset="0"/>
-                <a:ea typeface="微軟正黑體" pitchFamily="34" charset="-120"/>
-                <a:cs typeface="Calibri" panose="020F0502020204030204" pitchFamily="34" charset="0"/>
-              </a:rPr>
-              <a:t>việc Chúa không nao lòng</a:t>
+              <a:t>Thêm yêu Chúa, luôn tin cậy, hầu việc Chúa không nao lòng</a:t>
             </a:r>
             <a:endParaRPr lang="en-US" sz="3600" b="1" dirty="0">
               <a:solidFill>
@@ -4394,7 +4201,7 @@
               <a:t>( </a:t>
             </a:r>
             <a:r>
-              <a:rPr lang="zh-CN" altLang="en-US" sz="4267" b="1" dirty="0" smtClean="0">
+              <a:rPr lang="zh-CN" altLang="en-US" sz="4267" b="1" dirty="0">
                 <a:solidFill>
                   <a:srgbClr val="000066"/>
                 </a:solidFill>
@@ -4402,10 +4209,10 @@
                 <a:latin typeface="Microsoft JhengHei" panose="020B0604030504040204" pitchFamily="34" charset="-120"/>
                 <a:ea typeface="Microsoft JhengHei" panose="020B0604030504040204" pitchFamily="34" charset="-120"/>
               </a:rPr>
-              <a:t>正</a:t>
-            </a:r>
-            <a:r>
-              <a:rPr lang="en-US" sz="4267" b="1" dirty="0" smtClean="0">
+              <a:t>正歌</a:t>
+            </a:r>
+            <a:r>
+              <a:rPr lang="en-US" sz="4267" b="1" dirty="0">
                 <a:solidFill>
                   <a:srgbClr val="000066"/>
                 </a:solidFill>
@@ -4413,18 +4220,7 @@
                 <a:latin typeface="Microsoft JhengHei" panose="020B0604030504040204" pitchFamily="34" charset="-120"/>
                 <a:ea typeface="Microsoft JhengHei" panose="020B0604030504040204" pitchFamily="34" charset="-120"/>
               </a:rPr>
-              <a:t> </a:t>
-            </a:r>
-            <a:r>
-              <a:rPr lang="en-US" sz="4267" b="1" dirty="0">
-                <a:solidFill>
-                  <a:srgbClr val="000066"/>
-                </a:solidFill>
-                <a:effectLst/>
-                <a:latin typeface="Microsoft JhengHei" panose="020B0604030504040204" pitchFamily="34" charset="-120"/>
-                <a:ea typeface="Microsoft JhengHei" panose="020B0604030504040204" pitchFamily="34" charset="-120"/>
-              </a:rPr>
-              <a:t>)</a:t>
+              <a:t> )</a:t>
             </a:r>
             <a:endParaRPr lang="vi-VN" sz="4267" b="1" dirty="0">
               <a:solidFill>
@@ -4734,7 +4530,7 @@
               <a:t>( </a:t>
             </a:r>
             <a:r>
-              <a:rPr lang="zh-CN" altLang="en-US" sz="4267" b="1" dirty="0" smtClean="0">
+              <a:rPr lang="zh-CN" altLang="en-US" sz="4267" b="1" dirty="0">
                 <a:solidFill>
                   <a:srgbClr val="000066"/>
                 </a:solidFill>
@@ -4742,10 +4538,10 @@
                 <a:latin typeface="Microsoft JhengHei" panose="020B0604030504040204" pitchFamily="34" charset="-120"/>
                 <a:ea typeface="Microsoft JhengHei" panose="020B0604030504040204" pitchFamily="34" charset="-120"/>
               </a:rPr>
-              <a:t>正</a:t>
-            </a:r>
-            <a:r>
-              <a:rPr lang="en-US" sz="4267" b="1" dirty="0" smtClean="0">
+              <a:t>正歌</a:t>
+            </a:r>
+            <a:r>
+              <a:rPr lang="en-US" sz="4267" b="1" dirty="0">
                 <a:solidFill>
                   <a:srgbClr val="000066"/>
                 </a:solidFill>
@@ -4753,18 +4549,7 @@
                 <a:latin typeface="Microsoft JhengHei" panose="020B0604030504040204" pitchFamily="34" charset="-120"/>
                 <a:ea typeface="Microsoft JhengHei" panose="020B0604030504040204" pitchFamily="34" charset="-120"/>
               </a:rPr>
-              <a:t> </a:t>
-            </a:r>
-            <a:r>
-              <a:rPr lang="en-US" sz="4267" b="1" dirty="0">
-                <a:solidFill>
-                  <a:srgbClr val="000066"/>
-                </a:solidFill>
-                <a:effectLst/>
-                <a:latin typeface="Microsoft JhengHei" panose="020B0604030504040204" pitchFamily="34" charset="-120"/>
-                <a:ea typeface="Microsoft JhengHei" panose="020B0604030504040204" pitchFamily="34" charset="-120"/>
-              </a:rPr>
-              <a:t>)</a:t>
+              <a:t> )</a:t>
             </a:r>
             <a:endParaRPr lang="vi-VN" sz="4267" b="1" dirty="0">
               <a:solidFill>
@@ -5074,7 +4859,7 @@
               <a:t>( </a:t>
             </a:r>
             <a:r>
-              <a:rPr lang="zh-CN" altLang="en-US" sz="4267" b="1" dirty="0" smtClean="0">
+              <a:rPr lang="zh-CN" altLang="en-US" sz="4267" b="1" dirty="0">
                 <a:solidFill>
                   <a:srgbClr val="000066"/>
                 </a:solidFill>
@@ -5082,10 +4867,10 @@
                 <a:latin typeface="Microsoft JhengHei" panose="020B0604030504040204" pitchFamily="34" charset="-120"/>
                 <a:ea typeface="Microsoft JhengHei" panose="020B0604030504040204" pitchFamily="34" charset="-120"/>
               </a:rPr>
-              <a:t>副</a:t>
-            </a:r>
-            <a:r>
-              <a:rPr lang="en-US" sz="4267" b="1" dirty="0" smtClean="0">
+              <a:t>副歌</a:t>
+            </a:r>
+            <a:r>
+              <a:rPr lang="en-US" sz="4267" b="1" dirty="0">
                 <a:solidFill>
                   <a:srgbClr val="000066"/>
                 </a:solidFill>
@@ -5093,18 +4878,7 @@
                 <a:latin typeface="Microsoft JhengHei" panose="020B0604030504040204" pitchFamily="34" charset="-120"/>
                 <a:ea typeface="Microsoft JhengHei" panose="020B0604030504040204" pitchFamily="34" charset="-120"/>
               </a:rPr>
-              <a:t> </a:t>
-            </a:r>
-            <a:r>
-              <a:rPr lang="en-US" sz="4267" b="1" dirty="0">
-                <a:solidFill>
-                  <a:srgbClr val="000066"/>
-                </a:solidFill>
-                <a:effectLst/>
-                <a:latin typeface="Microsoft JhengHei" panose="020B0604030504040204" pitchFamily="34" charset="-120"/>
-                <a:ea typeface="Microsoft JhengHei" panose="020B0604030504040204" pitchFamily="34" charset="-120"/>
-              </a:rPr>
-              <a:t>)</a:t>
+              <a:t> )</a:t>
             </a:r>
             <a:endParaRPr lang="vi-VN" sz="4267" b="1" dirty="0">
               <a:solidFill>
@@ -5403,7 +5177,7 @@
           <a:p>
             <a:pPr algn="ctr"/>
             <a:r>
-              <a:rPr lang="en-US" sz="4267" b="1" dirty="0" smtClean="0">
+              <a:rPr lang="en-US" sz="4267" b="1" dirty="0">
                 <a:solidFill>
                   <a:srgbClr val="000066"/>
                 </a:solidFill>
@@ -5414,7 +5188,7 @@
               <a:t>( </a:t>
             </a:r>
             <a:r>
-              <a:rPr lang="zh-CN" altLang="en-US" sz="4267" b="1" dirty="0" smtClean="0">
+              <a:rPr lang="zh-CN" altLang="en-US" sz="4267" b="1" dirty="0">
                 <a:solidFill>
                   <a:srgbClr val="000066"/>
                 </a:solidFill>
@@ -5422,10 +5196,10 @@
                 <a:latin typeface="Microsoft JhengHei" panose="020B0604030504040204" pitchFamily="34" charset="-120"/>
                 <a:ea typeface="Microsoft JhengHei" panose="020B0604030504040204" pitchFamily="34" charset="-120"/>
               </a:rPr>
-              <a:t>副</a:t>
-            </a:r>
-            <a:r>
-              <a:rPr lang="en-US" sz="4267" b="1" dirty="0" smtClean="0">
+              <a:t>副歌</a:t>
+            </a:r>
+            <a:r>
+              <a:rPr lang="en-US" sz="4267" b="1" dirty="0">
                 <a:solidFill>
                   <a:srgbClr val="000066"/>
                 </a:solidFill>
@@ -5509,73 +5283,7 @@
                 <a:latin typeface="微軟正黑體" pitchFamily="34" charset="-120"/>
                 <a:ea typeface="微軟正黑體" pitchFamily="34" charset="-120"/>
               </a:rPr>
-              <a:t>敬拜主 </a:t>
-            </a:r>
-            <a:r>
-              <a:rPr lang="zh-CN" altLang="en-US" sz="6400" b="1" dirty="0" smtClean="0">
-                <a:solidFill>
-                  <a:srgbClr val="000066"/>
-                </a:solidFill>
-                <a:effectLst/>
-                <a:latin typeface="微軟正黑體" pitchFamily="34" charset="-120"/>
-                <a:ea typeface="微軟正黑體" pitchFamily="34" charset="-120"/>
-              </a:rPr>
-              <a:t> 祝</a:t>
-            </a:r>
-            <a:r>
-              <a:rPr lang="zh-CN" altLang="en-US" sz="6400" b="1" dirty="0">
-                <a:solidFill>
-                  <a:srgbClr val="000066"/>
-                </a:solidFill>
-                <a:effectLst/>
-                <a:latin typeface="微軟正黑體" pitchFamily="34" charset="-120"/>
-                <a:ea typeface="微軟正黑體" pitchFamily="34" charset="-120"/>
-              </a:rPr>
-              <a:t>新年 </a:t>
-            </a:r>
-            <a:r>
-              <a:rPr lang="zh-CN" altLang="en-US" sz="6400" b="1" dirty="0" smtClean="0">
-                <a:solidFill>
-                  <a:srgbClr val="000066"/>
-                </a:solidFill>
-                <a:effectLst/>
-                <a:latin typeface="微軟正黑體" pitchFamily="34" charset="-120"/>
-                <a:ea typeface="微軟正黑體" pitchFamily="34" charset="-120"/>
-              </a:rPr>
-              <a:t> 頌</a:t>
-            </a:r>
-            <a:r>
-              <a:rPr lang="zh-CN" altLang="en-US" sz="6400" b="1" dirty="0">
-                <a:solidFill>
-                  <a:srgbClr val="000066"/>
-                </a:solidFill>
-                <a:effectLst/>
-                <a:latin typeface="微軟正黑體" pitchFamily="34" charset="-120"/>
-                <a:ea typeface="微軟正黑體" pitchFamily="34" charset="-120"/>
-              </a:rPr>
-              <a:t>讚主 </a:t>
-            </a:r>
-            <a:r>
-              <a:rPr lang="zh-CN" altLang="en-US" sz="6400" b="1" dirty="0" smtClean="0">
-                <a:solidFill>
-                  <a:srgbClr val="000066"/>
-                </a:solidFill>
-                <a:effectLst/>
-                <a:latin typeface="微軟正黑體" pitchFamily="34" charset="-120"/>
-                <a:ea typeface="微軟正黑體" pitchFamily="34" charset="-120"/>
-              </a:rPr>
-              <a:t> 慶</a:t>
-            </a:r>
-            <a:r>
-              <a:rPr lang="zh-CN" altLang="en-US" sz="6400" b="1" dirty="0">
-                <a:solidFill>
-                  <a:srgbClr val="000066"/>
-                </a:solidFill>
-                <a:effectLst/>
-                <a:latin typeface="微軟正黑體" pitchFamily="34" charset="-120"/>
-                <a:ea typeface="微軟正黑體" pitchFamily="34" charset="-120"/>
-              </a:rPr>
-              <a:t>賀年</a:t>
+              <a:t>敬拜主  祝新年  頌讚主  慶賀年</a:t>
             </a:r>
             <a:endParaRPr lang="en-US" altLang="zh-CN" sz="6400" b="1" dirty="0">
               <a:solidFill>
@@ -5798,7 +5506,7 @@
           <a:p>
             <a:pPr algn="ctr"/>
             <a:r>
-              <a:rPr lang="en-US" sz="4267" b="1" dirty="0" smtClean="0">
+              <a:rPr lang="en-US" sz="4267" b="1" dirty="0">
                 <a:solidFill>
                   <a:srgbClr val="000066"/>
                 </a:solidFill>
@@ -5809,7 +5517,7 @@
               <a:t>( </a:t>
             </a:r>
             <a:r>
-              <a:rPr lang="zh-CN" altLang="en-US" sz="4267" b="1" dirty="0" smtClean="0">
+              <a:rPr lang="zh-CN" altLang="en-US" sz="4267" b="1" dirty="0">
                 <a:solidFill>
                   <a:srgbClr val="000066"/>
                 </a:solidFill>
@@ -5817,10 +5525,10 @@
                 <a:latin typeface="Microsoft JhengHei" panose="020B0604030504040204" pitchFamily="34" charset="-120"/>
                 <a:ea typeface="Microsoft JhengHei" panose="020B0604030504040204" pitchFamily="34" charset="-120"/>
               </a:rPr>
-              <a:t>副</a:t>
-            </a:r>
-            <a:r>
-              <a:rPr lang="en-US" sz="4267" b="1" dirty="0" smtClean="0">
+              <a:t>副歌</a:t>
+            </a:r>
+            <a:r>
+              <a:rPr lang="en-US" sz="4267" b="1" dirty="0">
                 <a:solidFill>
                   <a:srgbClr val="000066"/>
                 </a:solidFill>
@@ -6127,7 +5835,7 @@
           <a:p>
             <a:pPr algn="ctr"/>
             <a:r>
-              <a:rPr lang="en-US" sz="4267" b="1" dirty="0" smtClean="0">
+              <a:rPr lang="en-US" sz="4267" b="1" dirty="0">
                 <a:solidFill>
                   <a:srgbClr val="000066"/>
                 </a:solidFill>
@@ -6138,7 +5846,7 @@
               <a:t>( </a:t>
             </a:r>
             <a:r>
-              <a:rPr lang="zh-CN" altLang="en-US" sz="4267" b="1" dirty="0" smtClean="0">
+              <a:rPr lang="zh-CN" altLang="en-US" sz="4267" b="1" dirty="0">
                 <a:solidFill>
                   <a:srgbClr val="000066"/>
                 </a:solidFill>
@@ -6146,10 +5854,10 @@
                 <a:latin typeface="Microsoft JhengHei" panose="020B0604030504040204" pitchFamily="34" charset="-120"/>
                 <a:ea typeface="Microsoft JhengHei" panose="020B0604030504040204" pitchFamily="34" charset="-120"/>
               </a:rPr>
-              <a:t>副</a:t>
-            </a:r>
-            <a:r>
-              <a:rPr lang="en-US" sz="4267" b="1" dirty="0" smtClean="0">
+              <a:t>副歌</a:t>
+            </a:r>
+            <a:r>
+              <a:rPr lang="en-US" sz="4267" b="1" dirty="0">
                 <a:solidFill>
                   <a:srgbClr val="000066"/>
                 </a:solidFill>

--- a/中越詩歌/賀年歌_Lời chúc năm mới.pptx
+++ b/中越詩歌/賀年歌_Lời chúc năm mới.pptx
@@ -7,13 +7,16 @@
   <p:sldIdLst>
     <p:sldId id="257" r:id="rId2"/>
     <p:sldId id="258" r:id="rId3"/>
-    <p:sldId id="259" r:id="rId4"/>
-    <p:sldId id="260" r:id="rId5"/>
-    <p:sldId id="261" r:id="rId6"/>
-    <p:sldId id="262" r:id="rId7"/>
-    <p:sldId id="263" r:id="rId8"/>
-    <p:sldId id="264" r:id="rId9"/>
-    <p:sldId id="265" r:id="rId10"/>
+    <p:sldId id="266" r:id="rId4"/>
+    <p:sldId id="259" r:id="rId5"/>
+    <p:sldId id="260" r:id="rId6"/>
+    <p:sldId id="267" r:id="rId7"/>
+    <p:sldId id="261" r:id="rId8"/>
+    <p:sldId id="262" r:id="rId9"/>
+    <p:sldId id="263" r:id="rId10"/>
+    <p:sldId id="264" r:id="rId11"/>
+    <p:sldId id="268" r:id="rId12"/>
+    <p:sldId id="265" r:id="rId13"/>
   </p:sldIdLst>
   <p:sldSz cx="12192000" cy="6858000"/>
   <p:notesSz cx="6858000" cy="9144000"/>
@@ -301,7 +304,7 @@
           <a:p>
             <a:fld id="{A46F35FE-84BF-429E-AAA1-22ACF5210481}" type="datetimeFigureOut">
               <a:rPr lang="vi-VN" smtClean="0"/>
-              <a:t>26/01/2025</a:t>
+              <a:t>16/02/2026</a:t>
             </a:fld>
             <a:endParaRPr lang="vi-VN"/>
           </a:p>
@@ -471,7 +474,7 @@
           <a:p>
             <a:fld id="{A46F35FE-84BF-429E-AAA1-22ACF5210481}" type="datetimeFigureOut">
               <a:rPr lang="vi-VN" smtClean="0"/>
-              <a:t>26/01/2025</a:t>
+              <a:t>16/02/2026</a:t>
             </a:fld>
             <a:endParaRPr lang="vi-VN"/>
           </a:p>
@@ -651,7 +654,7 @@
           <a:p>
             <a:fld id="{A46F35FE-84BF-429E-AAA1-22ACF5210481}" type="datetimeFigureOut">
               <a:rPr lang="vi-VN" smtClean="0"/>
-              <a:t>26/01/2025</a:t>
+              <a:t>16/02/2026</a:t>
             </a:fld>
             <a:endParaRPr lang="vi-VN"/>
           </a:p>
@@ -821,7 +824,7 @@
           <a:p>
             <a:fld id="{A46F35FE-84BF-429E-AAA1-22ACF5210481}" type="datetimeFigureOut">
               <a:rPr lang="vi-VN" smtClean="0"/>
-              <a:t>26/01/2025</a:t>
+              <a:t>16/02/2026</a:t>
             </a:fld>
             <a:endParaRPr lang="vi-VN"/>
           </a:p>
@@ -1067,7 +1070,7 @@
           <a:p>
             <a:fld id="{A46F35FE-84BF-429E-AAA1-22ACF5210481}" type="datetimeFigureOut">
               <a:rPr lang="vi-VN" smtClean="0"/>
-              <a:t>26/01/2025</a:t>
+              <a:t>16/02/2026</a:t>
             </a:fld>
             <a:endParaRPr lang="vi-VN"/>
           </a:p>
@@ -1355,7 +1358,7 @@
           <a:p>
             <a:fld id="{A46F35FE-84BF-429E-AAA1-22ACF5210481}" type="datetimeFigureOut">
               <a:rPr lang="vi-VN" smtClean="0"/>
-              <a:t>26/01/2025</a:t>
+              <a:t>16/02/2026</a:t>
             </a:fld>
             <a:endParaRPr lang="vi-VN"/>
           </a:p>
@@ -1777,7 +1780,7 @@
           <a:p>
             <a:fld id="{A46F35FE-84BF-429E-AAA1-22ACF5210481}" type="datetimeFigureOut">
               <a:rPr lang="vi-VN" smtClean="0"/>
-              <a:t>26/01/2025</a:t>
+              <a:t>16/02/2026</a:t>
             </a:fld>
             <a:endParaRPr lang="vi-VN"/>
           </a:p>
@@ -1895,7 +1898,7 @@
           <a:p>
             <a:fld id="{A46F35FE-84BF-429E-AAA1-22ACF5210481}" type="datetimeFigureOut">
               <a:rPr lang="vi-VN" smtClean="0"/>
-              <a:t>26/01/2025</a:t>
+              <a:t>16/02/2026</a:t>
             </a:fld>
             <a:endParaRPr lang="vi-VN"/>
           </a:p>
@@ -1990,7 +1993,7 @@
           <a:p>
             <a:fld id="{A46F35FE-84BF-429E-AAA1-22ACF5210481}" type="datetimeFigureOut">
               <a:rPr lang="vi-VN" smtClean="0"/>
-              <a:t>26/01/2025</a:t>
+              <a:t>16/02/2026</a:t>
             </a:fld>
             <a:endParaRPr lang="vi-VN"/>
           </a:p>
@@ -2267,7 +2270,7 @@
           <a:p>
             <a:fld id="{A46F35FE-84BF-429E-AAA1-22ACF5210481}" type="datetimeFigureOut">
               <a:rPr lang="vi-VN" smtClean="0"/>
-              <a:t>26/01/2025</a:t>
+              <a:t>16/02/2026</a:t>
             </a:fld>
             <a:endParaRPr lang="vi-VN"/>
           </a:p>
@@ -2524,7 +2527,7 @@
           <a:p>
             <a:fld id="{A46F35FE-84BF-429E-AAA1-22ACF5210481}" type="datetimeFigureOut">
               <a:rPr lang="vi-VN" smtClean="0"/>
-              <a:t>26/01/2025</a:t>
+              <a:t>16/02/2026</a:t>
             </a:fld>
             <a:endParaRPr lang="vi-VN"/>
           </a:p>
@@ -2740,7 +2743,7 @@
           <a:p>
             <a:fld id="{A46F35FE-84BF-429E-AAA1-22ACF5210481}" type="datetimeFigureOut">
               <a:rPr lang="vi-VN" smtClean="0"/>
-              <a:t>26/01/2025</a:t>
+              <a:t>16/02/2026</a:t>
             </a:fld>
             <a:endParaRPr lang="vi-VN"/>
           </a:p>
@@ -3258,6 +3261,1029 @@
 </p:sld>
 </file>
 
+<file path=ppt/slides/slide10.xml><?xml version="1.0" encoding="utf-8"?>
+<p:sld xmlns:a="http://schemas.openxmlformats.org/drawingml/2006/main" xmlns:r="http://schemas.openxmlformats.org/officeDocument/2006/relationships" xmlns:p="http://schemas.openxmlformats.org/presentationml/2006/main">
+  <p:cSld>
+    <p:spTree>
+      <p:nvGrpSpPr>
+        <p:cNvPr id="1" name=""/>
+        <p:cNvGrpSpPr/>
+        <p:nvPr/>
+      </p:nvGrpSpPr>
+      <p:grpSpPr>
+        <a:xfrm>
+          <a:off x="0" y="0"/>
+          <a:ext cx="0" cy="0"/>
+          <a:chOff x="0" y="0"/>
+          <a:chExt cx="0" cy="0"/>
+        </a:xfrm>
+      </p:grpSpPr>
+      <p:sp>
+        <p:nvSpPr>
+          <p:cNvPr id="5" name="內容版面配置區 4"/>
+          <p:cNvSpPr>
+            <a:spLocks noGrp="1"/>
+          </p:cNvSpPr>
+          <p:nvPr>
+            <p:ph idx="1"/>
+          </p:nvPr>
+        </p:nvSpPr>
+        <p:spPr>
+          <a:xfrm>
+            <a:off x="0" y="2167981"/>
+            <a:ext cx="12192000" cy="1318225"/>
+          </a:xfrm>
+        </p:spPr>
+        <p:txBody>
+          <a:bodyPr anchor="ctr">
+            <a:normAutofit/>
+          </a:bodyPr>
+          <a:lstStyle/>
+          <a:p>
+            <a:pPr algn="ctr">
+              <a:buNone/>
+            </a:pPr>
+            <a:r>
+              <a:rPr lang="zh-CN" altLang="en-US" sz="6400" b="1" dirty="0">
+                <a:solidFill>
+                  <a:srgbClr val="000066"/>
+                </a:solidFill>
+                <a:effectLst/>
+                <a:latin typeface="微軟正黑體" pitchFamily="34" charset="-120"/>
+                <a:ea typeface="微軟正黑體" pitchFamily="34" charset="-120"/>
+              </a:rPr>
+              <a:t>敬拜主  祝新年</a:t>
+            </a:r>
+            <a:endParaRPr lang="en-US" altLang="zh-CN" sz="6400" b="1" dirty="0">
+              <a:solidFill>
+                <a:srgbClr val="000066"/>
+              </a:solidFill>
+              <a:effectLst/>
+              <a:latin typeface="微軟正黑體" pitchFamily="34" charset="-120"/>
+              <a:ea typeface="微軟正黑體" pitchFamily="34" charset="-120"/>
+            </a:endParaRPr>
+          </a:p>
+        </p:txBody>
+      </p:sp>
+      <p:sp>
+        <p:nvSpPr>
+          <p:cNvPr id="3" name="內容版面配置區 4"/>
+          <p:cNvSpPr txBox="1">
+            <a:spLocks/>
+          </p:cNvSpPr>
+          <p:nvPr/>
+        </p:nvSpPr>
+        <p:spPr>
+          <a:xfrm>
+            <a:off x="0" y="3117530"/>
+            <a:ext cx="12192000" cy="1318225"/>
+          </a:xfrm>
+          <a:prstGeom prst="rect">
+            <a:avLst/>
+          </a:prstGeom>
+        </p:spPr>
+        <p:txBody>
+          <a:bodyPr vert="horz" lIns="91440" tIns="45720" rIns="91440" bIns="45720" rtlCol="0" anchor="ctr">
+            <a:normAutofit/>
+          </a:bodyPr>
+          <a:lstStyle>
+            <a:lvl1pPr marL="457189" indent="-457189" algn="l" defTabSz="1219170" rtl="0" eaLnBrk="1" latinLnBrk="0" hangingPunct="1">
+              <a:spcBef>
+                <a:spcPct val="20000"/>
+              </a:spcBef>
+              <a:buFont typeface="Arial" pitchFamily="34" charset="0"/>
+              <a:buChar char="•"/>
+              <a:defRPr sz="4267" kern="1200">
+                <a:solidFill>
+                  <a:schemeClr val="tx1"/>
+                </a:solidFill>
+                <a:latin typeface="+mn-lt"/>
+                <a:ea typeface="+mn-ea"/>
+                <a:cs typeface="+mn-cs"/>
+              </a:defRPr>
+            </a:lvl1pPr>
+            <a:lvl2pPr marL="990575" indent="-380990" algn="l" defTabSz="1219170" rtl="0" eaLnBrk="1" latinLnBrk="0" hangingPunct="1">
+              <a:spcBef>
+                <a:spcPct val="20000"/>
+              </a:spcBef>
+              <a:buFont typeface="Arial" pitchFamily="34" charset="0"/>
+              <a:buChar char="–"/>
+              <a:defRPr sz="3733" kern="1200">
+                <a:solidFill>
+                  <a:schemeClr val="tx1"/>
+                </a:solidFill>
+                <a:latin typeface="+mn-lt"/>
+                <a:ea typeface="+mn-ea"/>
+                <a:cs typeface="+mn-cs"/>
+              </a:defRPr>
+            </a:lvl2pPr>
+            <a:lvl3pPr marL="1523962" indent="-304792" algn="l" defTabSz="1219170" rtl="0" eaLnBrk="1" latinLnBrk="0" hangingPunct="1">
+              <a:spcBef>
+                <a:spcPct val="20000"/>
+              </a:spcBef>
+              <a:buFont typeface="Arial" pitchFamily="34" charset="0"/>
+              <a:buChar char="•"/>
+              <a:defRPr sz="3200" kern="1200">
+                <a:solidFill>
+                  <a:schemeClr val="tx1"/>
+                </a:solidFill>
+                <a:latin typeface="+mn-lt"/>
+                <a:ea typeface="+mn-ea"/>
+                <a:cs typeface="+mn-cs"/>
+              </a:defRPr>
+            </a:lvl3pPr>
+            <a:lvl4pPr marL="2133547" indent="-304792" algn="l" defTabSz="1219170" rtl="0" eaLnBrk="1" latinLnBrk="0" hangingPunct="1">
+              <a:spcBef>
+                <a:spcPct val="20000"/>
+              </a:spcBef>
+              <a:buFont typeface="Arial" pitchFamily="34" charset="0"/>
+              <a:buChar char="–"/>
+              <a:defRPr sz="2667" kern="1200">
+                <a:solidFill>
+                  <a:schemeClr val="tx1"/>
+                </a:solidFill>
+                <a:latin typeface="+mn-lt"/>
+                <a:ea typeface="+mn-ea"/>
+                <a:cs typeface="+mn-cs"/>
+              </a:defRPr>
+            </a:lvl4pPr>
+            <a:lvl5pPr marL="2743131" indent="-304792" algn="l" defTabSz="1219170" rtl="0" eaLnBrk="1" latinLnBrk="0" hangingPunct="1">
+              <a:spcBef>
+                <a:spcPct val="20000"/>
+              </a:spcBef>
+              <a:buFont typeface="Arial" pitchFamily="34" charset="0"/>
+              <a:buChar char="»"/>
+              <a:defRPr sz="2667" kern="1200">
+                <a:solidFill>
+                  <a:schemeClr val="tx1"/>
+                </a:solidFill>
+                <a:latin typeface="+mn-lt"/>
+                <a:ea typeface="+mn-ea"/>
+                <a:cs typeface="+mn-cs"/>
+              </a:defRPr>
+            </a:lvl5pPr>
+            <a:lvl6pPr marL="3352716" indent="-304792" algn="l" defTabSz="1219170" rtl="0" eaLnBrk="1" latinLnBrk="0" hangingPunct="1">
+              <a:spcBef>
+                <a:spcPct val="20000"/>
+              </a:spcBef>
+              <a:buFont typeface="Arial" pitchFamily="34" charset="0"/>
+              <a:buChar char="•"/>
+              <a:defRPr sz="2667" kern="1200">
+                <a:solidFill>
+                  <a:schemeClr val="tx1"/>
+                </a:solidFill>
+                <a:latin typeface="+mn-lt"/>
+                <a:ea typeface="+mn-ea"/>
+                <a:cs typeface="+mn-cs"/>
+              </a:defRPr>
+            </a:lvl6pPr>
+            <a:lvl7pPr marL="3962301" indent="-304792" algn="l" defTabSz="1219170" rtl="0" eaLnBrk="1" latinLnBrk="0" hangingPunct="1">
+              <a:spcBef>
+                <a:spcPct val="20000"/>
+              </a:spcBef>
+              <a:buFont typeface="Arial" pitchFamily="34" charset="0"/>
+              <a:buChar char="•"/>
+              <a:defRPr sz="2667" kern="1200">
+                <a:solidFill>
+                  <a:schemeClr val="tx1"/>
+                </a:solidFill>
+                <a:latin typeface="+mn-lt"/>
+                <a:ea typeface="+mn-ea"/>
+                <a:cs typeface="+mn-cs"/>
+              </a:defRPr>
+            </a:lvl7pPr>
+            <a:lvl8pPr marL="4571886" indent="-304792" algn="l" defTabSz="1219170" rtl="0" eaLnBrk="1" latinLnBrk="0" hangingPunct="1">
+              <a:spcBef>
+                <a:spcPct val="20000"/>
+              </a:spcBef>
+              <a:buFont typeface="Arial" pitchFamily="34" charset="0"/>
+              <a:buChar char="•"/>
+              <a:defRPr sz="2667" kern="1200">
+                <a:solidFill>
+                  <a:schemeClr val="tx1"/>
+                </a:solidFill>
+                <a:latin typeface="+mn-lt"/>
+                <a:ea typeface="+mn-ea"/>
+                <a:cs typeface="+mn-cs"/>
+              </a:defRPr>
+            </a:lvl8pPr>
+            <a:lvl9pPr marL="5181470" indent="-304792" algn="l" defTabSz="1219170" rtl="0" eaLnBrk="1" latinLnBrk="0" hangingPunct="1">
+              <a:spcBef>
+                <a:spcPct val="20000"/>
+              </a:spcBef>
+              <a:buFont typeface="Arial" pitchFamily="34" charset="0"/>
+              <a:buChar char="•"/>
+              <a:defRPr sz="2667" kern="1200">
+                <a:solidFill>
+                  <a:schemeClr val="tx1"/>
+                </a:solidFill>
+                <a:latin typeface="+mn-lt"/>
+                <a:ea typeface="+mn-ea"/>
+                <a:cs typeface="+mn-cs"/>
+              </a:defRPr>
+            </a:lvl9pPr>
+          </a:lstStyle>
+          <a:p>
+            <a:pPr marL="0" indent="0" algn="ctr">
+              <a:buNone/>
+            </a:pPr>
+            <a:r>
+              <a:rPr lang="vi-VN" sz="4000" b="1" dirty="0">
+                <a:solidFill>
+                  <a:srgbClr val="660033"/>
+                </a:solidFill>
+                <a:effectLst/>
+                <a:latin typeface="Calibri" panose="020F0502020204030204" pitchFamily="34" charset="0"/>
+                <a:ea typeface="微軟正黑體" pitchFamily="34" charset="-120"/>
+                <a:cs typeface="Calibri" panose="020F0502020204030204" pitchFamily="34" charset="0"/>
+              </a:rPr>
+              <a:t>Xin ơn Chúa, luôn tuôn tràn</a:t>
+            </a:r>
+            <a:endParaRPr lang="en-US" sz="4000" b="1" dirty="0">
+              <a:solidFill>
+                <a:srgbClr val="660033"/>
+              </a:solidFill>
+              <a:effectLst/>
+              <a:latin typeface="Calibri" panose="020F0502020204030204" pitchFamily="34" charset="0"/>
+              <a:ea typeface="微軟正黑體" pitchFamily="34" charset="-120"/>
+              <a:cs typeface="Calibri" panose="020F0502020204030204" pitchFamily="34" charset="0"/>
+            </a:endParaRPr>
+          </a:p>
+        </p:txBody>
+      </p:sp>
+      <p:sp>
+        <p:nvSpPr>
+          <p:cNvPr id="4" name="TextBox 3"/>
+          <p:cNvSpPr txBox="1"/>
+          <p:nvPr/>
+        </p:nvSpPr>
+        <p:spPr>
+          <a:xfrm>
+            <a:off x="0" y="5253203"/>
+            <a:ext cx="12192000" cy="748988"/>
+          </a:xfrm>
+          <a:prstGeom prst="rect">
+            <a:avLst/>
+          </a:prstGeom>
+          <a:noFill/>
+        </p:spPr>
+        <p:txBody>
+          <a:bodyPr wrap="square" rtlCol="0">
+            <a:spAutoFit/>
+          </a:bodyPr>
+          <a:lstStyle/>
+          <a:p>
+            <a:pPr algn="ctr"/>
+            <a:r>
+              <a:rPr lang="en-US" sz="4267" b="1" dirty="0">
+                <a:solidFill>
+                  <a:srgbClr val="000066"/>
+                </a:solidFill>
+                <a:effectLst/>
+                <a:latin typeface="Microsoft JhengHei" panose="020B0604030504040204" pitchFamily="34" charset="-120"/>
+                <a:ea typeface="Microsoft JhengHei" panose="020B0604030504040204" pitchFamily="34" charset="-120"/>
+              </a:rPr>
+              <a:t>( </a:t>
+            </a:r>
+            <a:r>
+              <a:rPr lang="zh-CN" altLang="en-US" sz="4267" b="1" dirty="0">
+                <a:solidFill>
+                  <a:srgbClr val="000066"/>
+                </a:solidFill>
+                <a:effectLst/>
+                <a:latin typeface="Microsoft JhengHei" panose="020B0604030504040204" pitchFamily="34" charset="-120"/>
+                <a:ea typeface="Microsoft JhengHei" panose="020B0604030504040204" pitchFamily="34" charset="-120"/>
+              </a:rPr>
+              <a:t>副歌</a:t>
+            </a:r>
+            <a:r>
+              <a:rPr lang="en-US" sz="4267" b="1" dirty="0">
+                <a:solidFill>
+                  <a:srgbClr val="000066"/>
+                </a:solidFill>
+                <a:effectLst/>
+                <a:latin typeface="Microsoft JhengHei" panose="020B0604030504040204" pitchFamily="34" charset="-120"/>
+                <a:ea typeface="Microsoft JhengHei" panose="020B0604030504040204" pitchFamily="34" charset="-120"/>
+              </a:rPr>
+              <a:t> )</a:t>
+            </a:r>
+            <a:endParaRPr lang="vi-VN" sz="4267" b="1" dirty="0">
+              <a:solidFill>
+                <a:srgbClr val="000066"/>
+              </a:solidFill>
+              <a:effectLst/>
+              <a:ea typeface="Microsoft JhengHei" panose="020B0604030504040204" pitchFamily="34" charset="-120"/>
+            </a:endParaRPr>
+          </a:p>
+        </p:txBody>
+      </p:sp>
+    </p:spTree>
+    <p:extLst>
+      <p:ext uri="{BB962C8B-B14F-4D97-AF65-F5344CB8AC3E}">
+        <p14:creationId xmlns:p14="http://schemas.microsoft.com/office/powerpoint/2010/main" val="1712945437"/>
+      </p:ext>
+    </p:extLst>
+  </p:cSld>
+  <p:clrMapOvr>
+    <a:masterClrMapping/>
+  </p:clrMapOvr>
+</p:sld>
+</file>
+
+<file path=ppt/slides/slide11.xml><?xml version="1.0" encoding="utf-8"?>
+<p:sld xmlns:a="http://schemas.openxmlformats.org/drawingml/2006/main" xmlns:r="http://schemas.openxmlformats.org/officeDocument/2006/relationships" xmlns:p="http://schemas.openxmlformats.org/presentationml/2006/main">
+  <p:cSld>
+    <p:spTree>
+      <p:nvGrpSpPr>
+        <p:cNvPr id="1" name="">
+          <a:extLst>
+            <a:ext uri="{FF2B5EF4-FFF2-40B4-BE49-F238E27FC236}">
+              <a16:creationId xmlns:a16="http://schemas.microsoft.com/office/drawing/2014/main" id="{58ED1E9E-59BB-F988-EFFD-68C34CEA02AF}"/>
+            </a:ext>
+          </a:extLst>
+        </p:cNvPr>
+        <p:cNvGrpSpPr/>
+        <p:nvPr/>
+      </p:nvGrpSpPr>
+      <p:grpSpPr>
+        <a:xfrm>
+          <a:off x="0" y="0"/>
+          <a:ext cx="0" cy="0"/>
+          <a:chOff x="0" y="0"/>
+          <a:chExt cx="0" cy="0"/>
+        </a:xfrm>
+      </p:grpSpPr>
+      <p:sp>
+        <p:nvSpPr>
+          <p:cNvPr id="5" name="內容版面配置區 4">
+            <a:extLst>
+              <a:ext uri="{FF2B5EF4-FFF2-40B4-BE49-F238E27FC236}">
+                <a16:creationId xmlns:a16="http://schemas.microsoft.com/office/drawing/2014/main" id="{5A446F60-5AE0-2795-5263-BD382B693718}"/>
+              </a:ext>
+            </a:extLst>
+          </p:cNvPr>
+          <p:cNvSpPr>
+            <a:spLocks noGrp="1"/>
+          </p:cNvSpPr>
+          <p:nvPr>
+            <p:ph idx="1"/>
+          </p:nvPr>
+        </p:nvSpPr>
+        <p:spPr>
+          <a:xfrm>
+            <a:off x="0" y="2167981"/>
+            <a:ext cx="12192000" cy="1318225"/>
+          </a:xfrm>
+        </p:spPr>
+        <p:txBody>
+          <a:bodyPr anchor="ctr">
+            <a:normAutofit/>
+          </a:bodyPr>
+          <a:lstStyle/>
+          <a:p>
+            <a:pPr algn="ctr">
+              <a:buNone/>
+            </a:pPr>
+            <a:r>
+              <a:rPr lang="zh-CN" altLang="en-US" sz="6400" b="1" dirty="0">
+                <a:solidFill>
+                  <a:srgbClr val="000066"/>
+                </a:solidFill>
+                <a:effectLst/>
+                <a:latin typeface="微軟正黑體" pitchFamily="34" charset="-120"/>
+                <a:ea typeface="微軟正黑體" pitchFamily="34" charset="-120"/>
+              </a:rPr>
+              <a:t>頌讚主  慶賀年</a:t>
+            </a:r>
+            <a:endParaRPr lang="en-US" altLang="zh-CN" sz="6400" b="1" dirty="0">
+              <a:solidFill>
+                <a:srgbClr val="000066"/>
+              </a:solidFill>
+              <a:effectLst/>
+              <a:latin typeface="微軟正黑體" pitchFamily="34" charset="-120"/>
+              <a:ea typeface="微軟正黑體" pitchFamily="34" charset="-120"/>
+            </a:endParaRPr>
+          </a:p>
+        </p:txBody>
+      </p:sp>
+      <p:sp>
+        <p:nvSpPr>
+          <p:cNvPr id="3" name="內容版面配置區 4">
+            <a:extLst>
+              <a:ext uri="{FF2B5EF4-FFF2-40B4-BE49-F238E27FC236}">
+                <a16:creationId xmlns:a16="http://schemas.microsoft.com/office/drawing/2014/main" id="{9FBFE4CC-29F4-7986-737E-F87174612E79}"/>
+              </a:ext>
+            </a:extLst>
+          </p:cNvPr>
+          <p:cNvSpPr txBox="1">
+            <a:spLocks/>
+          </p:cNvSpPr>
+          <p:nvPr/>
+        </p:nvSpPr>
+        <p:spPr>
+          <a:xfrm>
+            <a:off x="0" y="3117530"/>
+            <a:ext cx="12192000" cy="1318225"/>
+          </a:xfrm>
+          <a:prstGeom prst="rect">
+            <a:avLst/>
+          </a:prstGeom>
+        </p:spPr>
+        <p:txBody>
+          <a:bodyPr vert="horz" lIns="91440" tIns="45720" rIns="91440" bIns="45720" rtlCol="0" anchor="ctr">
+            <a:normAutofit/>
+          </a:bodyPr>
+          <a:lstStyle>
+            <a:lvl1pPr marL="457189" indent="-457189" algn="l" defTabSz="1219170" rtl="0" eaLnBrk="1" latinLnBrk="0" hangingPunct="1">
+              <a:spcBef>
+                <a:spcPct val="20000"/>
+              </a:spcBef>
+              <a:buFont typeface="Arial" pitchFamily="34" charset="0"/>
+              <a:buChar char="•"/>
+              <a:defRPr sz="4267" kern="1200">
+                <a:solidFill>
+                  <a:schemeClr val="tx1"/>
+                </a:solidFill>
+                <a:latin typeface="+mn-lt"/>
+                <a:ea typeface="+mn-ea"/>
+                <a:cs typeface="+mn-cs"/>
+              </a:defRPr>
+            </a:lvl1pPr>
+            <a:lvl2pPr marL="990575" indent="-380990" algn="l" defTabSz="1219170" rtl="0" eaLnBrk="1" latinLnBrk="0" hangingPunct="1">
+              <a:spcBef>
+                <a:spcPct val="20000"/>
+              </a:spcBef>
+              <a:buFont typeface="Arial" pitchFamily="34" charset="0"/>
+              <a:buChar char="–"/>
+              <a:defRPr sz="3733" kern="1200">
+                <a:solidFill>
+                  <a:schemeClr val="tx1"/>
+                </a:solidFill>
+                <a:latin typeface="+mn-lt"/>
+                <a:ea typeface="+mn-ea"/>
+                <a:cs typeface="+mn-cs"/>
+              </a:defRPr>
+            </a:lvl2pPr>
+            <a:lvl3pPr marL="1523962" indent="-304792" algn="l" defTabSz="1219170" rtl="0" eaLnBrk="1" latinLnBrk="0" hangingPunct="1">
+              <a:spcBef>
+                <a:spcPct val="20000"/>
+              </a:spcBef>
+              <a:buFont typeface="Arial" pitchFamily="34" charset="0"/>
+              <a:buChar char="•"/>
+              <a:defRPr sz="3200" kern="1200">
+                <a:solidFill>
+                  <a:schemeClr val="tx1"/>
+                </a:solidFill>
+                <a:latin typeface="+mn-lt"/>
+                <a:ea typeface="+mn-ea"/>
+                <a:cs typeface="+mn-cs"/>
+              </a:defRPr>
+            </a:lvl3pPr>
+            <a:lvl4pPr marL="2133547" indent="-304792" algn="l" defTabSz="1219170" rtl="0" eaLnBrk="1" latinLnBrk="0" hangingPunct="1">
+              <a:spcBef>
+                <a:spcPct val="20000"/>
+              </a:spcBef>
+              <a:buFont typeface="Arial" pitchFamily="34" charset="0"/>
+              <a:buChar char="–"/>
+              <a:defRPr sz="2667" kern="1200">
+                <a:solidFill>
+                  <a:schemeClr val="tx1"/>
+                </a:solidFill>
+                <a:latin typeface="+mn-lt"/>
+                <a:ea typeface="+mn-ea"/>
+                <a:cs typeface="+mn-cs"/>
+              </a:defRPr>
+            </a:lvl4pPr>
+            <a:lvl5pPr marL="2743131" indent="-304792" algn="l" defTabSz="1219170" rtl="0" eaLnBrk="1" latinLnBrk="0" hangingPunct="1">
+              <a:spcBef>
+                <a:spcPct val="20000"/>
+              </a:spcBef>
+              <a:buFont typeface="Arial" pitchFamily="34" charset="0"/>
+              <a:buChar char="»"/>
+              <a:defRPr sz="2667" kern="1200">
+                <a:solidFill>
+                  <a:schemeClr val="tx1"/>
+                </a:solidFill>
+                <a:latin typeface="+mn-lt"/>
+                <a:ea typeface="+mn-ea"/>
+                <a:cs typeface="+mn-cs"/>
+              </a:defRPr>
+            </a:lvl5pPr>
+            <a:lvl6pPr marL="3352716" indent="-304792" algn="l" defTabSz="1219170" rtl="0" eaLnBrk="1" latinLnBrk="0" hangingPunct="1">
+              <a:spcBef>
+                <a:spcPct val="20000"/>
+              </a:spcBef>
+              <a:buFont typeface="Arial" pitchFamily="34" charset="0"/>
+              <a:buChar char="•"/>
+              <a:defRPr sz="2667" kern="1200">
+                <a:solidFill>
+                  <a:schemeClr val="tx1"/>
+                </a:solidFill>
+                <a:latin typeface="+mn-lt"/>
+                <a:ea typeface="+mn-ea"/>
+                <a:cs typeface="+mn-cs"/>
+              </a:defRPr>
+            </a:lvl6pPr>
+            <a:lvl7pPr marL="3962301" indent="-304792" algn="l" defTabSz="1219170" rtl="0" eaLnBrk="1" latinLnBrk="0" hangingPunct="1">
+              <a:spcBef>
+                <a:spcPct val="20000"/>
+              </a:spcBef>
+              <a:buFont typeface="Arial" pitchFamily="34" charset="0"/>
+              <a:buChar char="•"/>
+              <a:defRPr sz="2667" kern="1200">
+                <a:solidFill>
+                  <a:schemeClr val="tx1"/>
+                </a:solidFill>
+                <a:latin typeface="+mn-lt"/>
+                <a:ea typeface="+mn-ea"/>
+                <a:cs typeface="+mn-cs"/>
+              </a:defRPr>
+            </a:lvl7pPr>
+            <a:lvl8pPr marL="4571886" indent="-304792" algn="l" defTabSz="1219170" rtl="0" eaLnBrk="1" latinLnBrk="0" hangingPunct="1">
+              <a:spcBef>
+                <a:spcPct val="20000"/>
+              </a:spcBef>
+              <a:buFont typeface="Arial" pitchFamily="34" charset="0"/>
+              <a:buChar char="•"/>
+              <a:defRPr sz="2667" kern="1200">
+                <a:solidFill>
+                  <a:schemeClr val="tx1"/>
+                </a:solidFill>
+                <a:latin typeface="+mn-lt"/>
+                <a:ea typeface="+mn-ea"/>
+                <a:cs typeface="+mn-cs"/>
+              </a:defRPr>
+            </a:lvl8pPr>
+            <a:lvl9pPr marL="5181470" indent="-304792" algn="l" defTabSz="1219170" rtl="0" eaLnBrk="1" latinLnBrk="0" hangingPunct="1">
+              <a:spcBef>
+                <a:spcPct val="20000"/>
+              </a:spcBef>
+              <a:buFont typeface="Arial" pitchFamily="34" charset="0"/>
+              <a:buChar char="•"/>
+              <a:defRPr sz="2667" kern="1200">
+                <a:solidFill>
+                  <a:schemeClr val="tx1"/>
+                </a:solidFill>
+                <a:latin typeface="+mn-lt"/>
+                <a:ea typeface="+mn-ea"/>
+                <a:cs typeface="+mn-cs"/>
+              </a:defRPr>
+            </a:lvl9pPr>
+          </a:lstStyle>
+          <a:p>
+            <a:pPr marL="0" indent="0" algn="ctr">
+              <a:buNone/>
+            </a:pPr>
+            <a:r>
+              <a:rPr lang="en-US" sz="4000" b="1" dirty="0">
+                <a:solidFill>
+                  <a:srgbClr val="660033"/>
+                </a:solidFill>
+                <a:effectLst/>
+                <a:latin typeface="Calibri" panose="020F0502020204030204" pitchFamily="34" charset="0"/>
+                <a:ea typeface="微軟正黑體" pitchFamily="34" charset="-120"/>
+                <a:cs typeface="Calibri" panose="020F0502020204030204" pitchFamily="34" charset="0"/>
+              </a:rPr>
+              <a:t>T</a:t>
+            </a:r>
+            <a:r>
+              <a:rPr lang="vi-VN" sz="4000" b="1" dirty="0">
+                <a:solidFill>
+                  <a:srgbClr val="660033"/>
+                </a:solidFill>
+                <a:effectLst/>
+                <a:latin typeface="Calibri" panose="020F0502020204030204" pitchFamily="34" charset="0"/>
+                <a:ea typeface="微軟正黑體" pitchFamily="34" charset="-120"/>
+                <a:cs typeface="Calibri" panose="020F0502020204030204" pitchFamily="34" charset="0"/>
+              </a:rPr>
+              <a:t>ình yêu Chúa luôn đong đầy</a:t>
+            </a:r>
+            <a:endParaRPr lang="en-US" sz="4000" b="1" dirty="0">
+              <a:solidFill>
+                <a:srgbClr val="660033"/>
+              </a:solidFill>
+              <a:effectLst/>
+              <a:latin typeface="Calibri" panose="020F0502020204030204" pitchFamily="34" charset="0"/>
+              <a:ea typeface="微軟正黑體" pitchFamily="34" charset="-120"/>
+              <a:cs typeface="Calibri" panose="020F0502020204030204" pitchFamily="34" charset="0"/>
+            </a:endParaRPr>
+          </a:p>
+        </p:txBody>
+      </p:sp>
+      <p:sp>
+        <p:nvSpPr>
+          <p:cNvPr id="4" name="TextBox 3">
+            <a:extLst>
+              <a:ext uri="{FF2B5EF4-FFF2-40B4-BE49-F238E27FC236}">
+                <a16:creationId xmlns:a16="http://schemas.microsoft.com/office/drawing/2014/main" id="{B9DC8A14-B144-4E70-3D8E-6BFA8B9F8D67}"/>
+              </a:ext>
+            </a:extLst>
+          </p:cNvPr>
+          <p:cNvSpPr txBox="1"/>
+          <p:nvPr/>
+        </p:nvSpPr>
+        <p:spPr>
+          <a:xfrm>
+            <a:off x="0" y="5253203"/>
+            <a:ext cx="12192000" cy="748988"/>
+          </a:xfrm>
+          <a:prstGeom prst="rect">
+            <a:avLst/>
+          </a:prstGeom>
+          <a:noFill/>
+        </p:spPr>
+        <p:txBody>
+          <a:bodyPr wrap="square" rtlCol="0">
+            <a:spAutoFit/>
+          </a:bodyPr>
+          <a:lstStyle/>
+          <a:p>
+            <a:pPr algn="ctr"/>
+            <a:r>
+              <a:rPr lang="en-US" sz="4267" b="1" dirty="0">
+                <a:solidFill>
+                  <a:srgbClr val="000066"/>
+                </a:solidFill>
+                <a:effectLst/>
+                <a:latin typeface="Microsoft JhengHei" panose="020B0604030504040204" pitchFamily="34" charset="-120"/>
+                <a:ea typeface="Microsoft JhengHei" panose="020B0604030504040204" pitchFamily="34" charset="-120"/>
+              </a:rPr>
+              <a:t>( </a:t>
+            </a:r>
+            <a:r>
+              <a:rPr lang="zh-CN" altLang="en-US" sz="4267" b="1" dirty="0">
+                <a:solidFill>
+                  <a:srgbClr val="000066"/>
+                </a:solidFill>
+                <a:effectLst/>
+                <a:latin typeface="Microsoft JhengHei" panose="020B0604030504040204" pitchFamily="34" charset="-120"/>
+                <a:ea typeface="Microsoft JhengHei" panose="020B0604030504040204" pitchFamily="34" charset="-120"/>
+              </a:rPr>
+              <a:t>副歌</a:t>
+            </a:r>
+            <a:r>
+              <a:rPr lang="en-US" sz="4267" b="1" dirty="0">
+                <a:solidFill>
+                  <a:srgbClr val="000066"/>
+                </a:solidFill>
+                <a:effectLst/>
+                <a:latin typeface="Microsoft JhengHei" panose="020B0604030504040204" pitchFamily="34" charset="-120"/>
+                <a:ea typeface="Microsoft JhengHei" panose="020B0604030504040204" pitchFamily="34" charset="-120"/>
+              </a:rPr>
+              <a:t> )</a:t>
+            </a:r>
+            <a:endParaRPr lang="vi-VN" sz="4267" b="1" dirty="0">
+              <a:solidFill>
+                <a:srgbClr val="000066"/>
+              </a:solidFill>
+              <a:effectLst/>
+              <a:ea typeface="Microsoft JhengHei" panose="020B0604030504040204" pitchFamily="34" charset="-120"/>
+            </a:endParaRPr>
+          </a:p>
+        </p:txBody>
+      </p:sp>
+    </p:spTree>
+    <p:extLst>
+      <p:ext uri="{BB962C8B-B14F-4D97-AF65-F5344CB8AC3E}">
+        <p14:creationId xmlns:p14="http://schemas.microsoft.com/office/powerpoint/2010/main" val="739792337"/>
+      </p:ext>
+    </p:extLst>
+  </p:cSld>
+  <p:clrMapOvr>
+    <a:masterClrMapping/>
+  </p:clrMapOvr>
+</p:sld>
+</file>
+
+<file path=ppt/slides/slide12.xml><?xml version="1.0" encoding="utf-8"?>
+<p:sld xmlns:a="http://schemas.openxmlformats.org/drawingml/2006/main" xmlns:r="http://schemas.openxmlformats.org/officeDocument/2006/relationships" xmlns:p="http://schemas.openxmlformats.org/presentationml/2006/main">
+  <p:cSld>
+    <p:spTree>
+      <p:nvGrpSpPr>
+        <p:cNvPr id="1" name=""/>
+        <p:cNvGrpSpPr/>
+        <p:nvPr/>
+      </p:nvGrpSpPr>
+      <p:grpSpPr>
+        <a:xfrm>
+          <a:off x="0" y="0"/>
+          <a:ext cx="0" cy="0"/>
+          <a:chOff x="0" y="0"/>
+          <a:chExt cx="0" cy="0"/>
+        </a:xfrm>
+      </p:grpSpPr>
+      <p:sp>
+        <p:nvSpPr>
+          <p:cNvPr id="5" name="內容版面配置區 4"/>
+          <p:cNvSpPr>
+            <a:spLocks noGrp="1"/>
+          </p:cNvSpPr>
+          <p:nvPr>
+            <p:ph idx="1"/>
+          </p:nvPr>
+        </p:nvSpPr>
+        <p:spPr>
+          <a:xfrm>
+            <a:off x="0" y="2167981"/>
+            <a:ext cx="12192000" cy="1318225"/>
+          </a:xfrm>
+        </p:spPr>
+        <p:txBody>
+          <a:bodyPr anchor="ctr">
+            <a:normAutofit/>
+          </a:bodyPr>
+          <a:lstStyle/>
+          <a:p>
+            <a:pPr algn="ctr">
+              <a:buNone/>
+            </a:pPr>
+            <a:r>
+              <a:rPr lang="zh-CN" altLang="en-US" sz="6400" b="1" dirty="0">
+                <a:solidFill>
+                  <a:srgbClr val="000066"/>
+                </a:solidFill>
+                <a:effectLst/>
+                <a:latin typeface="微軟正黑體" pitchFamily="34" charset="-120"/>
+                <a:ea typeface="微軟正黑體" pitchFamily="34" charset="-120"/>
+              </a:rPr>
+              <a:t>願愛主一生都不變</a:t>
+            </a:r>
+            <a:endParaRPr lang="en-US" altLang="zh-CN" sz="6400" b="1" dirty="0">
+              <a:solidFill>
+                <a:srgbClr val="000066"/>
+              </a:solidFill>
+              <a:effectLst/>
+              <a:latin typeface="微軟正黑體" pitchFamily="34" charset="-120"/>
+              <a:ea typeface="微軟正黑體" pitchFamily="34" charset="-120"/>
+            </a:endParaRPr>
+          </a:p>
+        </p:txBody>
+      </p:sp>
+      <p:sp>
+        <p:nvSpPr>
+          <p:cNvPr id="3" name="內容版面配置區 4"/>
+          <p:cNvSpPr txBox="1">
+            <a:spLocks/>
+          </p:cNvSpPr>
+          <p:nvPr/>
+        </p:nvSpPr>
+        <p:spPr>
+          <a:xfrm>
+            <a:off x="0" y="3117530"/>
+            <a:ext cx="12192000" cy="1318225"/>
+          </a:xfrm>
+          <a:prstGeom prst="rect">
+            <a:avLst/>
+          </a:prstGeom>
+        </p:spPr>
+        <p:txBody>
+          <a:bodyPr vert="horz" lIns="91440" tIns="45720" rIns="91440" bIns="45720" rtlCol="0" anchor="ctr">
+            <a:normAutofit/>
+          </a:bodyPr>
+          <a:lstStyle>
+            <a:lvl1pPr marL="457189" indent="-457189" algn="l" defTabSz="1219170" rtl="0" eaLnBrk="1" latinLnBrk="0" hangingPunct="1">
+              <a:spcBef>
+                <a:spcPct val="20000"/>
+              </a:spcBef>
+              <a:buFont typeface="Arial" pitchFamily="34" charset="0"/>
+              <a:buChar char="•"/>
+              <a:defRPr sz="4267" kern="1200">
+                <a:solidFill>
+                  <a:schemeClr val="tx1"/>
+                </a:solidFill>
+                <a:latin typeface="+mn-lt"/>
+                <a:ea typeface="+mn-ea"/>
+                <a:cs typeface="+mn-cs"/>
+              </a:defRPr>
+            </a:lvl1pPr>
+            <a:lvl2pPr marL="990575" indent="-380990" algn="l" defTabSz="1219170" rtl="0" eaLnBrk="1" latinLnBrk="0" hangingPunct="1">
+              <a:spcBef>
+                <a:spcPct val="20000"/>
+              </a:spcBef>
+              <a:buFont typeface="Arial" pitchFamily="34" charset="0"/>
+              <a:buChar char="–"/>
+              <a:defRPr sz="3733" kern="1200">
+                <a:solidFill>
+                  <a:schemeClr val="tx1"/>
+                </a:solidFill>
+                <a:latin typeface="+mn-lt"/>
+                <a:ea typeface="+mn-ea"/>
+                <a:cs typeface="+mn-cs"/>
+              </a:defRPr>
+            </a:lvl2pPr>
+            <a:lvl3pPr marL="1523962" indent="-304792" algn="l" defTabSz="1219170" rtl="0" eaLnBrk="1" latinLnBrk="0" hangingPunct="1">
+              <a:spcBef>
+                <a:spcPct val="20000"/>
+              </a:spcBef>
+              <a:buFont typeface="Arial" pitchFamily="34" charset="0"/>
+              <a:buChar char="•"/>
+              <a:defRPr sz="3200" kern="1200">
+                <a:solidFill>
+                  <a:schemeClr val="tx1"/>
+                </a:solidFill>
+                <a:latin typeface="+mn-lt"/>
+                <a:ea typeface="+mn-ea"/>
+                <a:cs typeface="+mn-cs"/>
+              </a:defRPr>
+            </a:lvl3pPr>
+            <a:lvl4pPr marL="2133547" indent="-304792" algn="l" defTabSz="1219170" rtl="0" eaLnBrk="1" latinLnBrk="0" hangingPunct="1">
+              <a:spcBef>
+                <a:spcPct val="20000"/>
+              </a:spcBef>
+              <a:buFont typeface="Arial" pitchFamily="34" charset="0"/>
+              <a:buChar char="–"/>
+              <a:defRPr sz="2667" kern="1200">
+                <a:solidFill>
+                  <a:schemeClr val="tx1"/>
+                </a:solidFill>
+                <a:latin typeface="+mn-lt"/>
+                <a:ea typeface="+mn-ea"/>
+                <a:cs typeface="+mn-cs"/>
+              </a:defRPr>
+            </a:lvl4pPr>
+            <a:lvl5pPr marL="2743131" indent="-304792" algn="l" defTabSz="1219170" rtl="0" eaLnBrk="1" latinLnBrk="0" hangingPunct="1">
+              <a:spcBef>
+                <a:spcPct val="20000"/>
+              </a:spcBef>
+              <a:buFont typeface="Arial" pitchFamily="34" charset="0"/>
+              <a:buChar char="»"/>
+              <a:defRPr sz="2667" kern="1200">
+                <a:solidFill>
+                  <a:schemeClr val="tx1"/>
+                </a:solidFill>
+                <a:latin typeface="+mn-lt"/>
+                <a:ea typeface="+mn-ea"/>
+                <a:cs typeface="+mn-cs"/>
+              </a:defRPr>
+            </a:lvl5pPr>
+            <a:lvl6pPr marL="3352716" indent="-304792" algn="l" defTabSz="1219170" rtl="0" eaLnBrk="1" latinLnBrk="0" hangingPunct="1">
+              <a:spcBef>
+                <a:spcPct val="20000"/>
+              </a:spcBef>
+              <a:buFont typeface="Arial" pitchFamily="34" charset="0"/>
+              <a:buChar char="•"/>
+              <a:defRPr sz="2667" kern="1200">
+                <a:solidFill>
+                  <a:schemeClr val="tx1"/>
+                </a:solidFill>
+                <a:latin typeface="+mn-lt"/>
+                <a:ea typeface="+mn-ea"/>
+                <a:cs typeface="+mn-cs"/>
+              </a:defRPr>
+            </a:lvl6pPr>
+            <a:lvl7pPr marL="3962301" indent="-304792" algn="l" defTabSz="1219170" rtl="0" eaLnBrk="1" latinLnBrk="0" hangingPunct="1">
+              <a:spcBef>
+                <a:spcPct val="20000"/>
+              </a:spcBef>
+              <a:buFont typeface="Arial" pitchFamily="34" charset="0"/>
+              <a:buChar char="•"/>
+              <a:defRPr sz="2667" kern="1200">
+                <a:solidFill>
+                  <a:schemeClr val="tx1"/>
+                </a:solidFill>
+                <a:latin typeface="+mn-lt"/>
+                <a:ea typeface="+mn-ea"/>
+                <a:cs typeface="+mn-cs"/>
+              </a:defRPr>
+            </a:lvl7pPr>
+            <a:lvl8pPr marL="4571886" indent="-304792" algn="l" defTabSz="1219170" rtl="0" eaLnBrk="1" latinLnBrk="0" hangingPunct="1">
+              <a:spcBef>
+                <a:spcPct val="20000"/>
+              </a:spcBef>
+              <a:buFont typeface="Arial" pitchFamily="34" charset="0"/>
+              <a:buChar char="•"/>
+              <a:defRPr sz="2667" kern="1200">
+                <a:solidFill>
+                  <a:schemeClr val="tx1"/>
+                </a:solidFill>
+                <a:latin typeface="+mn-lt"/>
+                <a:ea typeface="+mn-ea"/>
+                <a:cs typeface="+mn-cs"/>
+              </a:defRPr>
+            </a:lvl8pPr>
+            <a:lvl9pPr marL="5181470" indent="-304792" algn="l" defTabSz="1219170" rtl="0" eaLnBrk="1" latinLnBrk="0" hangingPunct="1">
+              <a:spcBef>
+                <a:spcPct val="20000"/>
+              </a:spcBef>
+              <a:buFont typeface="Arial" pitchFamily="34" charset="0"/>
+              <a:buChar char="•"/>
+              <a:defRPr sz="2667" kern="1200">
+                <a:solidFill>
+                  <a:schemeClr val="tx1"/>
+                </a:solidFill>
+                <a:latin typeface="+mn-lt"/>
+                <a:ea typeface="+mn-ea"/>
+                <a:cs typeface="+mn-cs"/>
+              </a:defRPr>
+            </a:lvl9pPr>
+          </a:lstStyle>
+          <a:p>
+            <a:pPr marL="0" indent="0" algn="ctr">
+              <a:buNone/>
+            </a:pPr>
+            <a:r>
+              <a:rPr lang="vi-VN" sz="4000" b="1" dirty="0">
+                <a:solidFill>
+                  <a:srgbClr val="660033"/>
+                </a:solidFill>
+                <a:effectLst/>
+                <a:latin typeface="Calibri" panose="020F0502020204030204" pitchFamily="34" charset="0"/>
+                <a:ea typeface="微軟正黑體" pitchFamily="34" charset="-120"/>
+                <a:cs typeface="Calibri" panose="020F0502020204030204" pitchFamily="34" charset="0"/>
+              </a:rPr>
+              <a:t>và một năm kết quả cho Cha nhiều hơn</a:t>
+            </a:r>
+            <a:endParaRPr lang="en-US" sz="4000" b="1" dirty="0">
+              <a:solidFill>
+                <a:srgbClr val="660033"/>
+              </a:solidFill>
+              <a:effectLst/>
+              <a:latin typeface="Calibri" panose="020F0502020204030204" pitchFamily="34" charset="0"/>
+              <a:ea typeface="微軟正黑體" pitchFamily="34" charset="-120"/>
+              <a:cs typeface="Calibri" panose="020F0502020204030204" pitchFamily="34" charset="0"/>
+            </a:endParaRPr>
+          </a:p>
+        </p:txBody>
+      </p:sp>
+      <p:sp>
+        <p:nvSpPr>
+          <p:cNvPr id="4" name="TextBox 3"/>
+          <p:cNvSpPr txBox="1"/>
+          <p:nvPr/>
+        </p:nvSpPr>
+        <p:spPr>
+          <a:xfrm>
+            <a:off x="0" y="5253203"/>
+            <a:ext cx="12192000" cy="748988"/>
+          </a:xfrm>
+          <a:prstGeom prst="rect">
+            <a:avLst/>
+          </a:prstGeom>
+          <a:noFill/>
+        </p:spPr>
+        <p:txBody>
+          <a:bodyPr wrap="square" rtlCol="0">
+            <a:spAutoFit/>
+          </a:bodyPr>
+          <a:lstStyle/>
+          <a:p>
+            <a:pPr algn="ctr"/>
+            <a:r>
+              <a:rPr lang="en-US" sz="4267" b="1" dirty="0">
+                <a:solidFill>
+                  <a:srgbClr val="000066"/>
+                </a:solidFill>
+                <a:effectLst/>
+                <a:latin typeface="Microsoft JhengHei" panose="020B0604030504040204" pitchFamily="34" charset="-120"/>
+                <a:ea typeface="Microsoft JhengHei" panose="020B0604030504040204" pitchFamily="34" charset="-120"/>
+              </a:rPr>
+              <a:t>( </a:t>
+            </a:r>
+            <a:r>
+              <a:rPr lang="zh-CN" altLang="en-US" sz="4267" b="1" dirty="0">
+                <a:solidFill>
+                  <a:srgbClr val="000066"/>
+                </a:solidFill>
+                <a:effectLst/>
+                <a:latin typeface="Microsoft JhengHei" panose="020B0604030504040204" pitchFamily="34" charset="-120"/>
+                <a:ea typeface="Microsoft JhengHei" panose="020B0604030504040204" pitchFamily="34" charset="-120"/>
+              </a:rPr>
+              <a:t>副歌</a:t>
+            </a:r>
+            <a:r>
+              <a:rPr lang="en-US" sz="4267" b="1" dirty="0">
+                <a:solidFill>
+                  <a:srgbClr val="000066"/>
+                </a:solidFill>
+                <a:effectLst/>
+                <a:latin typeface="Microsoft JhengHei" panose="020B0604030504040204" pitchFamily="34" charset="-120"/>
+                <a:ea typeface="Microsoft JhengHei" panose="020B0604030504040204" pitchFamily="34" charset="-120"/>
+              </a:rPr>
+              <a:t> )</a:t>
+            </a:r>
+            <a:endParaRPr lang="vi-VN" sz="4267" b="1" dirty="0">
+              <a:solidFill>
+                <a:srgbClr val="000066"/>
+              </a:solidFill>
+              <a:effectLst/>
+              <a:ea typeface="Microsoft JhengHei" panose="020B0604030504040204" pitchFamily="34" charset="-120"/>
+            </a:endParaRPr>
+          </a:p>
+        </p:txBody>
+      </p:sp>
+    </p:spTree>
+    <p:extLst>
+      <p:ext uri="{BB962C8B-B14F-4D97-AF65-F5344CB8AC3E}">
+        <p14:creationId xmlns:p14="http://schemas.microsoft.com/office/powerpoint/2010/main" val="268764134"/>
+      </p:ext>
+    </p:extLst>
+  </p:cSld>
+  <p:clrMapOvr>
+    <a:masterClrMapping/>
+  </p:clrMapOvr>
+</p:sld>
+</file>
+
 <file path=ppt/slides/slide2.xml><?xml version="1.0" encoding="utf-8"?>
 <p:sld xmlns:a="http://schemas.openxmlformats.org/drawingml/2006/main" xmlns:r="http://schemas.openxmlformats.org/officeDocument/2006/relationships" xmlns:p="http://schemas.openxmlformats.org/presentationml/2006/main">
   <p:cSld>
@@ -3309,7 +4335,7 @@
                 <a:latin typeface="微軟正黑體" pitchFamily="34" charset="-120"/>
                 <a:ea typeface="微軟正黑體" pitchFamily="34" charset="-120"/>
               </a:rPr>
-              <a:t>敬拜主  祝新年  頌讚主慶賀年</a:t>
+              <a:t>敬拜主  祝新年</a:t>
             </a:r>
             <a:endParaRPr lang="en-US" altLang="zh-CN" sz="6400" b="1" dirty="0">
               <a:solidFill>
@@ -3485,7 +4511,7 @@
               <a:buNone/>
             </a:pPr>
             <a:r>
-              <a:rPr lang="vi-VN" sz="3600" b="1" dirty="0">
+              <a:rPr lang="vi-VN" sz="4000" b="1" dirty="0">
                 <a:solidFill>
                   <a:srgbClr val="660033"/>
                 </a:solidFill>
@@ -3494,9 +4520,9 @@
                 <a:ea typeface="微軟正黑體" pitchFamily="34" charset="-120"/>
                 <a:cs typeface="Calibri" panose="020F0502020204030204" pitchFamily="34" charset="0"/>
               </a:rPr>
-              <a:t>Vui xuân đến, hát khúc ca, ngợi khen Chúa, tôn vinh Ngài</a:t>
-            </a:r>
-            <a:endParaRPr lang="en-US" sz="3600" b="1" dirty="0">
+              <a:t>Vui xuân đến, hát khúc ca</a:t>
+            </a:r>
+            <a:endParaRPr lang="en-US" sz="4000" b="1" dirty="0">
               <a:solidFill>
                 <a:srgbClr val="660033"/>
               </a:solidFill>
@@ -3592,7 +4618,13 @@
   <p:cSld>
     <p:spTree>
       <p:nvGrpSpPr>
-        <p:cNvPr id="1" name=""/>
+        <p:cNvPr id="1" name="">
+          <a:extLst>
+            <a:ext uri="{FF2B5EF4-FFF2-40B4-BE49-F238E27FC236}">
+              <a16:creationId xmlns:a16="http://schemas.microsoft.com/office/drawing/2014/main" id="{9E01637C-A89A-6726-35B2-625A1036F089}"/>
+            </a:ext>
+          </a:extLst>
+        </p:cNvPr>
         <p:cNvGrpSpPr/>
         <p:nvPr/>
       </p:nvGrpSpPr>
@@ -3606,7 +4638,13 @@
       </p:grpSpPr>
       <p:sp>
         <p:nvSpPr>
-          <p:cNvPr id="5" name="內容版面配置區 4"/>
+          <p:cNvPr id="5" name="內容版面配置區 4">
+            <a:extLst>
+              <a:ext uri="{FF2B5EF4-FFF2-40B4-BE49-F238E27FC236}">
+                <a16:creationId xmlns:a16="http://schemas.microsoft.com/office/drawing/2014/main" id="{DBFA08F7-2970-E1E1-EE37-874501AB1B78}"/>
+              </a:ext>
+            </a:extLst>
+          </p:cNvPr>
           <p:cNvSpPr>
             <a:spLocks noGrp="1"/>
           </p:cNvSpPr>
@@ -3638,7 +4676,7 @@
                 <a:latin typeface="微軟正黑體" pitchFamily="34" charset="-120"/>
                 <a:ea typeface="微軟正黑體" pitchFamily="34" charset="-120"/>
               </a:rPr>
-              <a:t>願大家歡欣中過每天</a:t>
+              <a:t>頌讚主慶賀年</a:t>
             </a:r>
             <a:endParaRPr lang="en-US" altLang="zh-CN" sz="6400" b="1" dirty="0">
               <a:solidFill>
@@ -3653,7 +4691,13 @@
       </p:sp>
       <p:sp>
         <p:nvSpPr>
-          <p:cNvPr id="3" name="內容版面配置區 4"/>
+          <p:cNvPr id="3" name="內容版面配置區 4">
+            <a:extLst>
+              <a:ext uri="{FF2B5EF4-FFF2-40B4-BE49-F238E27FC236}">
+                <a16:creationId xmlns:a16="http://schemas.microsoft.com/office/drawing/2014/main" id="{EC372DCE-63CA-3569-FBB7-81DE9C4B5323}"/>
+              </a:ext>
+            </a:extLst>
+          </p:cNvPr>
           <p:cNvSpPr txBox="1">
             <a:spLocks/>
           </p:cNvSpPr>
@@ -3814,7 +4858,7 @@
               <a:buNone/>
             </a:pPr>
             <a:r>
-              <a:rPr lang="vi-VN" sz="4000" b="1" dirty="0">
+              <a:rPr lang="en-US" sz="4000" b="1" dirty="0">
                 <a:solidFill>
                   <a:srgbClr val="660033"/>
                 </a:solidFill>
@@ -3823,7 +4867,19 @@
                 <a:ea typeface="微軟正黑體" pitchFamily="34" charset="-120"/>
                 <a:cs typeface="Calibri" panose="020F0502020204030204" pitchFamily="34" charset="0"/>
               </a:rPr>
-              <a:t>cùng hoà ca khúc hát ơn Cha đầy tuôn</a:t>
+              <a:t>N</a:t>
+            </a:r>
+            <a:r>
+              <a:rPr lang="vi-VN" sz="4000" b="1" dirty="0">
+                <a:solidFill>
+                  <a:srgbClr val="660033"/>
+                </a:solidFill>
+                <a:effectLst/>
+                <a:latin typeface="Calibri" panose="020F0502020204030204" pitchFamily="34" charset="0"/>
+                <a:ea typeface="微軟正黑體" pitchFamily="34" charset="-120"/>
+                <a:cs typeface="Calibri" panose="020F0502020204030204" pitchFamily="34" charset="0"/>
+              </a:rPr>
+              <a:t>gợi khen Chúa, tôn vinh Ngài</a:t>
             </a:r>
             <a:endParaRPr lang="en-US" sz="4000" b="1" dirty="0">
               <a:solidFill>
@@ -3839,7 +4895,13 @@
       </p:sp>
       <p:sp>
         <p:nvSpPr>
-          <p:cNvPr id="4" name="TextBox 3"/>
+          <p:cNvPr id="4" name="TextBox 3">
+            <a:extLst>
+              <a:ext uri="{FF2B5EF4-FFF2-40B4-BE49-F238E27FC236}">
+                <a16:creationId xmlns:a16="http://schemas.microsoft.com/office/drawing/2014/main" id="{9B67C2DF-640A-938B-72E3-ECE6FA1D3BBD}"/>
+              </a:ext>
+            </a:extLst>
+          </p:cNvPr>
           <p:cNvSpPr txBox="1"/>
           <p:nvPr/>
         </p:nvSpPr>
@@ -3906,7 +4968,7 @@
     </p:spTree>
     <p:extLst>
       <p:ext uri="{BB962C8B-B14F-4D97-AF65-F5344CB8AC3E}">
-        <p14:creationId xmlns:p14="http://schemas.microsoft.com/office/powerpoint/2010/main" val="4038956483"/>
+        <p14:creationId xmlns:p14="http://schemas.microsoft.com/office/powerpoint/2010/main" val="2571712047"/>
       </p:ext>
     </p:extLst>
   </p:cSld>
@@ -3967,7 +5029,7 @@
                 <a:latin typeface="微軟正黑體" pitchFamily="34" charset="-120"/>
                 <a:ea typeface="微軟正黑體" pitchFamily="34" charset="-120"/>
               </a:rPr>
-              <a:t>信靠主  快樂年  同讚主  過年年</a:t>
+              <a:t>願大家歡欣中過每天</a:t>
             </a:r>
             <a:endParaRPr lang="en-US" altLang="zh-CN" sz="6400" b="1" dirty="0">
               <a:solidFill>
@@ -4143,7 +5205,7 @@
               <a:buNone/>
             </a:pPr>
             <a:r>
-              <a:rPr lang="vi-VN" sz="3600" b="1" dirty="0">
+              <a:rPr lang="vi-VN" sz="4000" b="1" dirty="0">
                 <a:solidFill>
                   <a:srgbClr val="660033"/>
                 </a:solidFill>
@@ -4152,9 +5214,9 @@
                 <a:ea typeface="微軟正黑體" pitchFamily="34" charset="-120"/>
                 <a:cs typeface="Calibri" panose="020F0502020204030204" pitchFamily="34" charset="0"/>
               </a:rPr>
-              <a:t>Thêm yêu Chúa, luôn tin cậy, hầu việc Chúa không nao lòng</a:t>
-            </a:r>
-            <a:endParaRPr lang="en-US" sz="3600" b="1" dirty="0">
+              <a:t>cùng hoà ca khúc hát ơn Cha đầy tuôn</a:t>
+            </a:r>
+            <a:endParaRPr lang="en-US" sz="4000" b="1" dirty="0">
               <a:solidFill>
                 <a:srgbClr val="660033"/>
               </a:solidFill>
@@ -4235,7 +5297,7 @@
     </p:spTree>
     <p:extLst>
       <p:ext uri="{BB962C8B-B14F-4D97-AF65-F5344CB8AC3E}">
-        <p14:creationId xmlns:p14="http://schemas.microsoft.com/office/powerpoint/2010/main" val="2676503777"/>
+        <p14:creationId xmlns:p14="http://schemas.microsoft.com/office/powerpoint/2010/main" val="4038956483"/>
       </p:ext>
     </p:extLst>
   </p:cSld>
@@ -4296,7 +5358,7 @@
                 <a:latin typeface="微軟正黑體" pitchFamily="34" charset="-120"/>
                 <a:ea typeface="微軟正黑體" pitchFamily="34" charset="-120"/>
               </a:rPr>
-              <a:t>願靠主彼此真心互勉</a:t>
+              <a:t>信靠主  快樂年</a:t>
             </a:r>
             <a:endParaRPr lang="en-US" altLang="zh-CN" sz="6400" b="1" dirty="0">
               <a:solidFill>
@@ -4481,7 +5543,7 @@
                 <a:ea typeface="微軟正黑體" pitchFamily="34" charset="-120"/>
                 <a:cs typeface="Calibri" panose="020F0502020204030204" pitchFamily="34" charset="0"/>
               </a:rPr>
-              <a:t>hằng truyền rao Cứu Chúa Giê-su mọi nơi</a:t>
+              <a:t>Thêm yêu Chúa, luôn tin cậy</a:t>
             </a:r>
             <a:endParaRPr lang="en-US" sz="4000" b="1" dirty="0">
               <a:solidFill>
@@ -4564,7 +5626,7 @@
     </p:spTree>
     <p:extLst>
       <p:ext uri="{BB962C8B-B14F-4D97-AF65-F5344CB8AC3E}">
-        <p14:creationId xmlns:p14="http://schemas.microsoft.com/office/powerpoint/2010/main" val="282043144"/>
+        <p14:creationId xmlns:p14="http://schemas.microsoft.com/office/powerpoint/2010/main" val="2676503777"/>
       </p:ext>
     </p:extLst>
   </p:cSld>
@@ -4579,7 +5641,13 @@
   <p:cSld>
     <p:spTree>
       <p:nvGrpSpPr>
-        <p:cNvPr id="1" name=""/>
+        <p:cNvPr id="1" name="">
+          <a:extLst>
+            <a:ext uri="{FF2B5EF4-FFF2-40B4-BE49-F238E27FC236}">
+              <a16:creationId xmlns:a16="http://schemas.microsoft.com/office/drawing/2014/main" id="{57EF9342-C0E4-1E08-5C49-78769DED3B8B}"/>
+            </a:ext>
+          </a:extLst>
+        </p:cNvPr>
         <p:cNvGrpSpPr/>
         <p:nvPr/>
       </p:nvGrpSpPr>
@@ -4593,7 +5661,13 @@
       </p:grpSpPr>
       <p:sp>
         <p:nvSpPr>
-          <p:cNvPr id="5" name="內容版面配置區 4"/>
+          <p:cNvPr id="5" name="內容版面配置區 4">
+            <a:extLst>
+              <a:ext uri="{FF2B5EF4-FFF2-40B4-BE49-F238E27FC236}">
+                <a16:creationId xmlns:a16="http://schemas.microsoft.com/office/drawing/2014/main" id="{6102794B-3820-7862-72D3-4581609E4068}"/>
+              </a:ext>
+            </a:extLst>
+          </p:cNvPr>
           <p:cNvSpPr>
             <a:spLocks noGrp="1"/>
           </p:cNvSpPr>
@@ -4625,7 +5699,7 @@
                 <a:latin typeface="微軟正黑體" pitchFamily="34" charset="-120"/>
                 <a:ea typeface="微軟正黑體" pitchFamily="34" charset="-120"/>
               </a:rPr>
-              <a:t>多少日子主必親手帶領</a:t>
+              <a:t>同讚主  過年年</a:t>
             </a:r>
             <a:endParaRPr lang="en-US" altLang="zh-CN" sz="6400" b="1" dirty="0">
               <a:solidFill>
@@ -4640,7 +5714,13 @@
       </p:sp>
       <p:sp>
         <p:nvSpPr>
-          <p:cNvPr id="3" name="內容版面配置區 4"/>
+          <p:cNvPr id="3" name="內容版面配置區 4">
+            <a:extLst>
+              <a:ext uri="{FF2B5EF4-FFF2-40B4-BE49-F238E27FC236}">
+                <a16:creationId xmlns:a16="http://schemas.microsoft.com/office/drawing/2014/main" id="{B9787743-E6B8-5F8D-3EFA-D1DAF046585C}"/>
+              </a:ext>
+            </a:extLst>
+          </p:cNvPr>
           <p:cNvSpPr txBox="1">
             <a:spLocks/>
           </p:cNvSpPr>
@@ -4801,6 +5881,17 @@
               <a:buNone/>
             </a:pPr>
             <a:r>
+              <a:rPr lang="en-US" sz="4000" b="1" dirty="0">
+                <a:solidFill>
+                  <a:srgbClr val="660033"/>
+                </a:solidFill>
+                <a:latin typeface="Calibri" panose="020F0502020204030204" pitchFamily="34" charset="0"/>
+                <a:ea typeface="微軟正黑體" pitchFamily="34" charset="-120"/>
+                <a:cs typeface="Calibri" panose="020F0502020204030204" pitchFamily="34" charset="0"/>
+              </a:rPr>
+              <a:t>H</a:t>
+            </a:r>
+            <a:r>
               <a:rPr lang="vi-VN" sz="4000" b="1" dirty="0">
                 <a:solidFill>
                   <a:srgbClr val="660033"/>
@@ -4810,7 +5901,7 @@
                 <a:ea typeface="微軟正黑體" pitchFamily="34" charset="-120"/>
                 <a:cs typeface="Calibri" panose="020F0502020204030204" pitchFamily="34" charset="0"/>
               </a:rPr>
-              <a:t>Khẩn xin lời Chúa hằng khắc sâu ở trong lòng con</a:t>
+              <a:t>ầu việc Chúa không nao lòng</a:t>
             </a:r>
             <a:endParaRPr lang="en-US" sz="4000" b="1" dirty="0">
               <a:solidFill>
@@ -4826,7 +5917,13 @@
       </p:sp>
       <p:sp>
         <p:nvSpPr>
-          <p:cNvPr id="4" name="TextBox 3"/>
+          <p:cNvPr id="4" name="TextBox 3">
+            <a:extLst>
+              <a:ext uri="{FF2B5EF4-FFF2-40B4-BE49-F238E27FC236}">
+                <a16:creationId xmlns:a16="http://schemas.microsoft.com/office/drawing/2014/main" id="{347A78C4-3FF3-0DE2-EE5F-C5EE8BB8C675}"/>
+              </a:ext>
+            </a:extLst>
+          </p:cNvPr>
           <p:cNvSpPr txBox="1"/>
           <p:nvPr/>
         </p:nvSpPr>
@@ -4867,7 +5964,7 @@
                 <a:latin typeface="Microsoft JhengHei" panose="020B0604030504040204" pitchFamily="34" charset="-120"/>
                 <a:ea typeface="Microsoft JhengHei" panose="020B0604030504040204" pitchFamily="34" charset="-120"/>
               </a:rPr>
-              <a:t>副歌</a:t>
+              <a:t>正歌</a:t>
             </a:r>
             <a:r>
               <a:rPr lang="en-US" sz="4267" b="1" dirty="0">
@@ -4893,7 +5990,7 @@
     </p:spTree>
     <p:extLst>
       <p:ext uri="{BB962C8B-B14F-4D97-AF65-F5344CB8AC3E}">
-        <p14:creationId xmlns:p14="http://schemas.microsoft.com/office/powerpoint/2010/main" val="3652022772"/>
+        <p14:creationId xmlns:p14="http://schemas.microsoft.com/office/powerpoint/2010/main" val="4121246539"/>
       </p:ext>
     </p:extLst>
   </p:cSld>
@@ -4954,7 +6051,7 @@
                 <a:latin typeface="微軟正黑體" pitchFamily="34" charset="-120"/>
                 <a:ea typeface="微軟正黑體" pitchFamily="34" charset="-120"/>
               </a:rPr>
-              <a:t>世事常變主愛沒變遷</a:t>
+              <a:t>願靠主彼此真心互勉</a:t>
             </a:r>
             <a:endParaRPr lang="en-US" altLang="zh-CN" sz="6400" b="1" dirty="0">
               <a:solidFill>
@@ -5130,7 +6227,7 @@
               <a:buNone/>
             </a:pPr>
             <a:r>
-              <a:rPr lang="vi-VN" sz="4000" b="1" dirty="0">
+              <a:rPr lang="en-US" sz="4000" b="1">
                 <a:solidFill>
                   <a:srgbClr val="660033"/>
                 </a:solidFill>
@@ -5139,7 +6236,31 @@
                 <a:ea typeface="微軟正黑體" pitchFamily="34" charset="-120"/>
                 <a:cs typeface="Calibri" panose="020F0502020204030204" pitchFamily="34" charset="0"/>
               </a:rPr>
-              <a:t>cuối xin Ngài đổi thay lòng con nên mới</a:t>
+              <a:t>H</a:t>
+            </a:r>
+            <a:r>
+              <a:rPr lang="vi-VN" sz="4000" b="1">
+                <a:solidFill>
+                  <a:srgbClr val="660033"/>
+                </a:solidFill>
+                <a:effectLst/>
+                <a:latin typeface="Calibri" panose="020F0502020204030204" pitchFamily="34" charset="0"/>
+                <a:ea typeface="微軟正黑體" pitchFamily="34" charset="-120"/>
+                <a:cs typeface="Calibri" panose="020F0502020204030204" pitchFamily="34" charset="0"/>
+              </a:rPr>
+              <a:t>ằng </a:t>
+            </a:r>
+            <a:r>
+              <a:rPr lang="vi-VN" sz="4000" b="1" dirty="0">
+                <a:solidFill>
+                  <a:srgbClr val="660033"/>
+                </a:solidFill>
+                <a:effectLst/>
+                <a:latin typeface="Calibri" panose="020F0502020204030204" pitchFamily="34" charset="0"/>
+                <a:ea typeface="微軟正黑體" pitchFamily="34" charset="-120"/>
+                <a:cs typeface="Calibri" panose="020F0502020204030204" pitchFamily="34" charset="0"/>
+              </a:rPr>
+              <a:t>truyền rao Cứu Chúa Giê-su mọi nơi</a:t>
             </a:r>
             <a:endParaRPr lang="en-US" sz="4000" b="1" dirty="0">
               <a:solidFill>
@@ -5196,7 +6317,7 @@
                 <a:latin typeface="Microsoft JhengHei" panose="020B0604030504040204" pitchFamily="34" charset="-120"/>
                 <a:ea typeface="Microsoft JhengHei" panose="020B0604030504040204" pitchFamily="34" charset="-120"/>
               </a:rPr>
-              <a:t>副歌</a:t>
+              <a:t>正歌</a:t>
             </a:r>
             <a:r>
               <a:rPr lang="en-US" sz="4267" b="1" dirty="0">
@@ -5222,7 +6343,7 @@
     </p:spTree>
     <p:extLst>
       <p:ext uri="{BB962C8B-B14F-4D97-AF65-F5344CB8AC3E}">
-        <p14:creationId xmlns:p14="http://schemas.microsoft.com/office/powerpoint/2010/main" val="542875054"/>
+        <p14:creationId xmlns:p14="http://schemas.microsoft.com/office/powerpoint/2010/main" val="282043144"/>
       </p:ext>
     </p:extLst>
   </p:cSld>
@@ -5283,7 +6404,7 @@
                 <a:latin typeface="微軟正黑體" pitchFamily="34" charset="-120"/>
                 <a:ea typeface="微軟正黑體" pitchFamily="34" charset="-120"/>
               </a:rPr>
-              <a:t>敬拜主  祝新年  頌讚主  慶賀年</a:t>
+              <a:t>多少日子主必親手帶領</a:t>
             </a:r>
             <a:endParaRPr lang="en-US" altLang="zh-CN" sz="6400" b="1" dirty="0">
               <a:solidFill>
@@ -5459,7 +6580,7 @@
               <a:buNone/>
             </a:pPr>
             <a:r>
-              <a:rPr lang="vi-VN" sz="3600" b="1" dirty="0">
+              <a:rPr lang="vi-VN" sz="4000" b="1" dirty="0">
                 <a:solidFill>
                   <a:srgbClr val="660033"/>
                 </a:solidFill>
@@ -5468,9 +6589,9 @@
                 <a:ea typeface="微軟正黑體" pitchFamily="34" charset="-120"/>
                 <a:cs typeface="Calibri" panose="020F0502020204030204" pitchFamily="34" charset="0"/>
               </a:rPr>
-              <a:t>Xin ơn Chúa, luôn tuôn tràn, tình yêu Chúa luôn đong đầy</a:t>
-            </a:r>
-            <a:endParaRPr lang="en-US" sz="3600" b="1" dirty="0">
+              <a:t>Khẩn xin lời Chúa hằng khắc sâu ở trong lòng con</a:t>
+            </a:r>
+            <a:endParaRPr lang="en-US" sz="4000" b="1" dirty="0">
               <a:solidFill>
                 <a:srgbClr val="660033"/>
               </a:solidFill>
@@ -5551,7 +6672,7 @@
     </p:spTree>
     <p:extLst>
       <p:ext uri="{BB962C8B-B14F-4D97-AF65-F5344CB8AC3E}">
-        <p14:creationId xmlns:p14="http://schemas.microsoft.com/office/powerpoint/2010/main" val="1712945437"/>
+        <p14:creationId xmlns:p14="http://schemas.microsoft.com/office/powerpoint/2010/main" val="3652022772"/>
       </p:ext>
     </p:extLst>
   </p:cSld>
@@ -5612,7 +6733,7 @@
                 <a:latin typeface="微軟正黑體" pitchFamily="34" charset="-120"/>
                 <a:ea typeface="微軟正黑體" pitchFamily="34" charset="-120"/>
               </a:rPr>
-              <a:t>願愛主一生都不變</a:t>
+              <a:t>世事常變主愛沒變遷</a:t>
             </a:r>
             <a:endParaRPr lang="en-US" altLang="zh-CN" sz="6400" b="1" dirty="0">
               <a:solidFill>
@@ -5797,7 +6918,7 @@
                 <a:ea typeface="微軟正黑體" pitchFamily="34" charset="-120"/>
                 <a:cs typeface="Calibri" panose="020F0502020204030204" pitchFamily="34" charset="0"/>
               </a:rPr>
-              <a:t>và một năm kết quả cho Cha nhiều hơn</a:t>
+              <a:t>cuối xin Ngài đổi thay lòng con nên mới</a:t>
             </a:r>
             <a:endParaRPr lang="en-US" sz="4000" b="1" dirty="0">
               <a:solidFill>
@@ -5880,7 +7001,7 @@
     </p:spTree>
     <p:extLst>
       <p:ext uri="{BB962C8B-B14F-4D97-AF65-F5344CB8AC3E}">
-        <p14:creationId xmlns:p14="http://schemas.microsoft.com/office/powerpoint/2010/main" val="268764134"/>
+        <p14:creationId xmlns:p14="http://schemas.microsoft.com/office/powerpoint/2010/main" val="542875054"/>
       </p:ext>
     </p:extLst>
   </p:cSld>
